--- a/ゲーム科1年/00_前期/ゲームプログラミングⅢ/04_押し出し処理.pptx
+++ b/ゲーム科1年/00_前期/ゲームプログラミングⅢ/04_押し出し処理.pptx
@@ -7212,7 +7212,7 @@
         </p:nvGrpSpPr>
         <p:grpSpPr>
           <a:xfrm>
-            <a:off x="1616413" y="4810575"/>
+            <a:off x="567542" y="4302575"/>
             <a:ext cx="3185487" cy="1449332"/>
             <a:chOff x="567542" y="4192239"/>
             <a:chExt cx="3185487" cy="1449332"/>
@@ -7391,6 +7391,50 @@
           </p:txBody>
         </p:sp>
       </p:grpSp>
+      <p:sp>
+        <p:nvSpPr>
+          <p:cNvPr id="11" name="テキスト ボックス 10">
+            <a:extLst>
+              <a:ext uri="{FF2B5EF4-FFF2-40B4-BE49-F238E27FC236}">
+                <a16:creationId xmlns:a16="http://schemas.microsoft.com/office/drawing/2014/main" id="{95E97A63-06A2-4FC7-AD6F-FF690345976E}"/>
+              </a:ext>
+            </a:extLst>
+          </p:cNvPr>
+          <p:cNvSpPr txBox="1"/>
+          <p:nvPr/>
+        </p:nvSpPr>
+        <p:spPr>
+          <a:xfrm>
+            <a:off x="567542" y="5889217"/>
+            <a:ext cx="3570208" cy="461665"/>
+          </a:xfrm>
+          <a:prstGeom prst="rect">
+            <a:avLst/>
+          </a:prstGeom>
+          <a:noFill/>
+        </p:spPr>
+        <p:txBody>
+          <a:bodyPr wrap="none" rtlCol="0">
+            <a:spAutoFit/>
+          </a:bodyPr>
+          <a:lstStyle/>
+          <a:p>
+            <a:r>
+              <a:rPr kumimoji="1" lang="ja-JP" altLang="en-US" sz="2400" b="1" dirty="0">
+                <a:solidFill>
+                  <a:srgbClr val="FF0000"/>
+                </a:solidFill>
+              </a:rPr>
+              <a:t>赤矢印を計算しましょう</a:t>
+            </a:r>
+            <a:endParaRPr lang="en-US" altLang="ja-JP" b="1" dirty="0">
+              <a:solidFill>
+                <a:srgbClr val="FF0000"/>
+              </a:solidFill>
+            </a:endParaRPr>
+          </a:p>
+        </p:txBody>
+      </p:sp>
     </p:spTree>
     <p:extLst>
       <p:ext uri="{BB962C8B-B14F-4D97-AF65-F5344CB8AC3E}">

--- a/ゲーム科1年/00_前期/ゲームプログラミングⅢ/04_押し出し処理.pptx
+++ b/ゲーム科1年/00_前期/ゲームプログラミングⅢ/04_押し出し処理.pptx
@@ -7,14 +7,15 @@
   <p:sldIdLst>
     <p:sldId id="256" r:id="rId2"/>
     <p:sldId id="257" r:id="rId3"/>
-    <p:sldId id="258" r:id="rId4"/>
-    <p:sldId id="259" r:id="rId5"/>
-    <p:sldId id="260" r:id="rId6"/>
-    <p:sldId id="263" r:id="rId7"/>
-    <p:sldId id="261" r:id="rId8"/>
-    <p:sldId id="262" r:id="rId9"/>
-    <p:sldId id="264" r:id="rId10"/>
-    <p:sldId id="265" r:id="rId11"/>
+    <p:sldId id="266" r:id="rId4"/>
+    <p:sldId id="258" r:id="rId5"/>
+    <p:sldId id="259" r:id="rId6"/>
+    <p:sldId id="260" r:id="rId7"/>
+    <p:sldId id="263" r:id="rId8"/>
+    <p:sldId id="261" r:id="rId9"/>
+    <p:sldId id="262" r:id="rId10"/>
+    <p:sldId id="264" r:id="rId11"/>
+    <p:sldId id="265" r:id="rId12"/>
   </p:sldIdLst>
   <p:sldSz cx="12192000" cy="6858000"/>
   <p:notesSz cx="6858000" cy="9144000"/>
@@ -268,7 +269,7 @@
           <a:p>
             <a:fld id="{E9CC885B-4903-4D54-9A93-00025F12DED9}" type="datetimeFigureOut">
               <a:rPr kumimoji="1" lang="ja-JP" altLang="en-US" smtClean="0"/>
-              <a:t>2026/2/12</a:t>
+              <a:t>2026/2/17</a:t>
             </a:fld>
             <a:endParaRPr kumimoji="1" lang="ja-JP" altLang="en-US"/>
           </a:p>
@@ -498,7 +499,7 @@
           <a:p>
             <a:fld id="{E9CC885B-4903-4D54-9A93-00025F12DED9}" type="datetimeFigureOut">
               <a:rPr kumimoji="1" lang="ja-JP" altLang="en-US" smtClean="0"/>
-              <a:t>2026/2/12</a:t>
+              <a:t>2026/2/17</a:t>
             </a:fld>
             <a:endParaRPr kumimoji="1" lang="ja-JP" altLang="en-US"/>
           </a:p>
@@ -738,7 +739,7 @@
           <a:p>
             <a:fld id="{E9CC885B-4903-4D54-9A93-00025F12DED9}" type="datetimeFigureOut">
               <a:rPr kumimoji="1" lang="ja-JP" altLang="en-US" smtClean="0"/>
-              <a:t>2026/2/12</a:t>
+              <a:t>2026/2/17</a:t>
             </a:fld>
             <a:endParaRPr kumimoji="1" lang="ja-JP" altLang="en-US"/>
           </a:p>
@@ -968,7 +969,7 @@
           <a:p>
             <a:fld id="{E9CC885B-4903-4D54-9A93-00025F12DED9}" type="datetimeFigureOut">
               <a:rPr kumimoji="1" lang="ja-JP" altLang="en-US" smtClean="0"/>
-              <a:t>2026/2/12</a:t>
+              <a:t>2026/2/17</a:t>
             </a:fld>
             <a:endParaRPr kumimoji="1" lang="ja-JP" altLang="en-US"/>
           </a:p>
@@ -1243,7 +1244,7 @@
           <a:p>
             <a:fld id="{E9CC885B-4903-4D54-9A93-00025F12DED9}" type="datetimeFigureOut">
               <a:rPr kumimoji="1" lang="ja-JP" altLang="en-US" smtClean="0"/>
-              <a:t>2026/2/12</a:t>
+              <a:t>2026/2/17</a:t>
             </a:fld>
             <a:endParaRPr kumimoji="1" lang="ja-JP" altLang="en-US"/>
           </a:p>
@@ -1572,7 +1573,7 @@
           <a:p>
             <a:fld id="{E9CC885B-4903-4D54-9A93-00025F12DED9}" type="datetimeFigureOut">
               <a:rPr kumimoji="1" lang="ja-JP" altLang="en-US" smtClean="0"/>
-              <a:t>2026/2/12</a:t>
+              <a:t>2026/2/17</a:t>
             </a:fld>
             <a:endParaRPr kumimoji="1" lang="ja-JP" altLang="en-US"/>
           </a:p>
@@ -2048,7 +2049,7 @@
           <a:p>
             <a:fld id="{E9CC885B-4903-4D54-9A93-00025F12DED9}" type="datetimeFigureOut">
               <a:rPr kumimoji="1" lang="ja-JP" altLang="en-US" smtClean="0"/>
-              <a:t>2026/2/12</a:t>
+              <a:t>2026/2/17</a:t>
             </a:fld>
             <a:endParaRPr kumimoji="1" lang="ja-JP" altLang="en-US"/>
           </a:p>
@@ -2189,7 +2190,7 @@
           <a:p>
             <a:fld id="{E9CC885B-4903-4D54-9A93-00025F12DED9}" type="datetimeFigureOut">
               <a:rPr kumimoji="1" lang="ja-JP" altLang="en-US" smtClean="0"/>
-              <a:t>2026/2/12</a:t>
+              <a:t>2026/2/17</a:t>
             </a:fld>
             <a:endParaRPr kumimoji="1" lang="ja-JP" altLang="en-US"/>
           </a:p>
@@ -2302,7 +2303,7 @@
           <a:p>
             <a:fld id="{E9CC885B-4903-4D54-9A93-00025F12DED9}" type="datetimeFigureOut">
               <a:rPr kumimoji="1" lang="ja-JP" altLang="en-US" smtClean="0"/>
-              <a:t>2026/2/12</a:t>
+              <a:t>2026/2/17</a:t>
             </a:fld>
             <a:endParaRPr kumimoji="1" lang="ja-JP" altLang="en-US"/>
           </a:p>
@@ -2645,7 +2646,7 @@
           <a:p>
             <a:fld id="{E9CC885B-4903-4D54-9A93-00025F12DED9}" type="datetimeFigureOut">
               <a:rPr kumimoji="1" lang="ja-JP" altLang="en-US" smtClean="0"/>
-              <a:t>2026/2/12</a:t>
+              <a:t>2026/2/17</a:t>
             </a:fld>
             <a:endParaRPr kumimoji="1" lang="ja-JP" altLang="en-US"/>
           </a:p>
@@ -2933,7 +2934,7 @@
           <a:p>
             <a:fld id="{E9CC885B-4903-4D54-9A93-00025F12DED9}" type="datetimeFigureOut">
               <a:rPr kumimoji="1" lang="ja-JP" altLang="en-US" smtClean="0"/>
-              <a:t>2026/2/12</a:t>
+              <a:t>2026/2/17</a:t>
             </a:fld>
             <a:endParaRPr kumimoji="1" lang="ja-JP" altLang="en-US"/>
           </a:p>
@@ -3206,7 +3207,7 @@
           <a:p>
             <a:fld id="{E9CC885B-4903-4D54-9A93-00025F12DED9}" type="datetimeFigureOut">
               <a:rPr kumimoji="1" lang="ja-JP" altLang="en-US" smtClean="0"/>
-              <a:t>2026/2/12</a:t>
+              <a:t>2026/2/17</a:t>
             </a:fld>
             <a:endParaRPr kumimoji="1" lang="ja-JP" altLang="en-US"/>
           </a:p>
@@ -4115,7 +4116,7 @@
         <p:spPr>
           <a:xfrm>
             <a:off x="567542" y="491954"/>
-            <a:ext cx="3584636" cy="584775"/>
+            <a:ext cx="3995004" cy="584775"/>
           </a:xfrm>
           <a:prstGeom prst="rect">
             <a:avLst/>
@@ -4130,7 +4131,7 @@
           <a:p>
             <a:r>
               <a:rPr kumimoji="1" lang="ja-JP" altLang="en-US" sz="3200" b="1" u="sng" dirty="0"/>
-              <a:t>押し出し処理 練習</a:t>
+              <a:t>押し出し処理 ヒント</a:t>
             </a:r>
           </a:p>
         </p:txBody>
@@ -4150,7 +4151,7 @@
         <p:spPr>
           <a:xfrm>
             <a:off x="567542" y="1216429"/>
-            <a:ext cx="8586005" cy="461665"/>
+            <a:ext cx="7263527" cy="461665"/>
           </a:xfrm>
           <a:prstGeom prst="rect">
             <a:avLst/>
@@ -4164,20 +4165,8 @@
           <a:lstStyle/>
           <a:p>
             <a:r>
-              <a:rPr kumimoji="1" lang="en-US" altLang="ja-JP" sz="2400" dirty="0"/>
-              <a:t>X</a:t>
-            </a:r>
-            <a:r>
               <a:rPr kumimoji="1" lang="ja-JP" altLang="en-US" sz="2400" dirty="0"/>
-              <a:t>軸の処理を参考に、</a:t>
-            </a:r>
-            <a:r>
-              <a:rPr kumimoji="1" lang="en-US" altLang="ja-JP" sz="2400" dirty="0"/>
-              <a:t>Y</a:t>
-            </a:r>
-            <a:r>
-              <a:rPr kumimoji="1" lang="ja-JP" altLang="en-US" sz="2400" dirty="0"/>
-              <a:t>軸の押し出し処理を完成させましょう</a:t>
+              <a:t>押し出した後は、これ以上動かないようにします。</a:t>
             </a:r>
             <a:endParaRPr kumimoji="1" lang="en-US" altLang="ja-JP" sz="2400" dirty="0"/>
           </a:p>
@@ -4188,7 +4177,7 @@
           <p:cNvPr id="5" name="図 4">
             <a:extLst>
               <a:ext uri="{FF2B5EF4-FFF2-40B4-BE49-F238E27FC236}">
-                <a16:creationId xmlns:a16="http://schemas.microsoft.com/office/drawing/2014/main" id="{D7DC1A3E-26D9-4959-AA71-B938E189AD3A}"/>
+                <a16:creationId xmlns:a16="http://schemas.microsoft.com/office/drawing/2014/main" id="{CFA148A9-50AA-44EB-AF3C-BB54C3137F98}"/>
               </a:ext>
             </a:extLst>
           </p:cNvPr>
@@ -4205,222 +4194,157 @@
         </p:blipFill>
         <p:spPr>
           <a:xfrm>
-            <a:off x="567542" y="1817794"/>
-            <a:ext cx="10172176" cy="4295083"/>
+            <a:off x="567541" y="1817794"/>
+            <a:ext cx="3735159" cy="1069339"/>
           </a:xfrm>
           <a:prstGeom prst="rect">
             <a:avLst/>
           </a:prstGeom>
         </p:spPr>
       </p:pic>
-      <p:sp>
-        <p:nvSpPr>
-          <p:cNvPr id="7" name="正方形/長方形 6">
-            <a:extLst>
-              <a:ext uri="{FF2B5EF4-FFF2-40B4-BE49-F238E27FC236}">
-                <a16:creationId xmlns:a16="http://schemas.microsoft.com/office/drawing/2014/main" id="{5F720A9A-4A2C-4BC2-87D3-3FCF615150F4}"/>
-              </a:ext>
-            </a:extLst>
-          </p:cNvPr>
-          <p:cNvSpPr/>
+    </p:spTree>
+    <p:extLst>
+      <p:ext uri="{BB962C8B-B14F-4D97-AF65-F5344CB8AC3E}">
+        <p14:creationId xmlns:p14="http://schemas.microsoft.com/office/powerpoint/2010/main" val="2731333665"/>
+      </p:ext>
+    </p:extLst>
+  </p:cSld>
+  <p:clrMapOvr>
+    <a:masterClrMapping/>
+  </p:clrMapOvr>
+</p:sld>
+</file>
+
+<file path=ppt/slides/slide11.xml><?xml version="1.0" encoding="utf-8"?>
+<p:sld xmlns:a="http://schemas.openxmlformats.org/drawingml/2006/main" xmlns:r="http://schemas.openxmlformats.org/officeDocument/2006/relationships" xmlns:p="http://schemas.openxmlformats.org/presentationml/2006/main">
+  <p:cSld>
+    <p:spTree>
+      <p:nvGrpSpPr>
+        <p:cNvPr id="1" name=""/>
+        <p:cNvGrpSpPr/>
+        <p:nvPr/>
+      </p:nvGrpSpPr>
+      <p:grpSpPr>
+        <a:xfrm>
+          <a:off x="0" y="0"/>
+          <a:ext cx="0" cy="0"/>
+          <a:chOff x="0" y="0"/>
+          <a:chExt cx="0" cy="0"/>
+        </a:xfrm>
+      </p:grpSpPr>
+      <p:sp>
+        <p:nvSpPr>
+          <p:cNvPr id="4" name="テキスト ボックス 3">
+            <a:extLst>
+              <a:ext uri="{FF2B5EF4-FFF2-40B4-BE49-F238E27FC236}">
+                <a16:creationId xmlns:a16="http://schemas.microsoft.com/office/drawing/2014/main" id="{5A13BF46-B8C5-48AA-8308-C9ECFF431A18}"/>
+              </a:ext>
+            </a:extLst>
+          </p:cNvPr>
+          <p:cNvSpPr txBox="1"/>
           <p:nvPr/>
         </p:nvSpPr>
         <p:spPr>
           <a:xfrm>
-            <a:off x="1763238" y="2017059"/>
-            <a:ext cx="3409397" cy="224118"/>
+            <a:off x="567542" y="491954"/>
+            <a:ext cx="3584636" cy="584775"/>
           </a:xfrm>
           <a:prstGeom prst="rect">
             <a:avLst/>
           </a:prstGeom>
           <a:noFill/>
-          <a:ln w="38100">
-            <a:solidFill>
-              <a:srgbClr val="FF0000"/>
-            </a:solidFill>
-          </a:ln>
-        </p:spPr>
-        <p:style>
-          <a:lnRef idx="2">
-            <a:schemeClr val="accent1">
-              <a:shade val="50000"/>
-            </a:schemeClr>
-          </a:lnRef>
-          <a:fillRef idx="1">
-            <a:schemeClr val="accent1"/>
-          </a:fillRef>
-          <a:effectRef idx="0">
-            <a:schemeClr val="accent1"/>
-          </a:effectRef>
-          <a:fontRef idx="minor">
-            <a:schemeClr val="lt1"/>
-          </a:fontRef>
-        </p:style>
-        <p:txBody>
-          <a:bodyPr rtlCol="0" anchor="ctr"/>
-          <a:lstStyle/>
-          <a:p>
-            <a:pPr algn="ctr"/>
-            <a:endParaRPr kumimoji="1" lang="ja-JP" altLang="en-US"/>
-          </a:p>
-        </p:txBody>
-      </p:sp>
-      <p:sp>
-        <p:nvSpPr>
-          <p:cNvPr id="8" name="正方形/長方形 7">
-            <a:extLst>
-              <a:ext uri="{FF2B5EF4-FFF2-40B4-BE49-F238E27FC236}">
-                <a16:creationId xmlns:a16="http://schemas.microsoft.com/office/drawing/2014/main" id="{E1A3BA27-5A2B-4BA9-AA11-27E45B2BA456}"/>
-              </a:ext>
-            </a:extLst>
-          </p:cNvPr>
-          <p:cNvSpPr/>
+        </p:spPr>
+        <p:txBody>
+          <a:bodyPr wrap="none" rtlCol="0">
+            <a:spAutoFit/>
+          </a:bodyPr>
+          <a:lstStyle/>
+          <a:p>
+            <a:r>
+              <a:rPr kumimoji="1" lang="ja-JP" altLang="en-US" sz="3200" b="1" u="sng" dirty="0"/>
+              <a:t>押し出し処理 練習</a:t>
+            </a:r>
+          </a:p>
+        </p:txBody>
+      </p:sp>
+      <p:sp>
+        <p:nvSpPr>
+          <p:cNvPr id="6" name="テキスト ボックス 5">
+            <a:extLst>
+              <a:ext uri="{FF2B5EF4-FFF2-40B4-BE49-F238E27FC236}">
+                <a16:creationId xmlns:a16="http://schemas.microsoft.com/office/drawing/2014/main" id="{55830AD6-028B-4C4E-80BF-B70DFC1C3A46}"/>
+              </a:ext>
+            </a:extLst>
+          </p:cNvPr>
+          <p:cNvSpPr txBox="1"/>
           <p:nvPr/>
         </p:nvSpPr>
         <p:spPr>
           <a:xfrm>
-            <a:off x="2244233" y="3723288"/>
-            <a:ext cx="3409397" cy="131536"/>
+            <a:off x="567542" y="1216429"/>
+            <a:ext cx="8586005" cy="461665"/>
           </a:xfrm>
           <a:prstGeom prst="rect">
             <a:avLst/>
           </a:prstGeom>
           <a:noFill/>
-          <a:ln w="38100">
-            <a:solidFill>
-              <a:srgbClr val="FF0000"/>
-            </a:solidFill>
-          </a:ln>
-        </p:spPr>
-        <p:style>
-          <a:lnRef idx="2">
-            <a:schemeClr val="accent1">
-              <a:shade val="50000"/>
-            </a:schemeClr>
-          </a:lnRef>
-          <a:fillRef idx="1">
-            <a:schemeClr val="accent1"/>
-          </a:fillRef>
-          <a:effectRef idx="0">
-            <a:schemeClr val="accent1"/>
-          </a:effectRef>
-          <a:fontRef idx="minor">
-            <a:schemeClr val="lt1"/>
-          </a:fontRef>
-        </p:style>
-        <p:txBody>
-          <a:bodyPr rtlCol="0" anchor="ctr"/>
-          <a:lstStyle/>
-          <a:p>
-            <a:pPr algn="ctr"/>
-            <a:endParaRPr kumimoji="1" lang="ja-JP" altLang="en-US"/>
-          </a:p>
-        </p:txBody>
-      </p:sp>
-      <p:sp>
-        <p:nvSpPr>
-          <p:cNvPr id="9" name="正方形/長方形 8">
-            <a:extLst>
-              <a:ext uri="{FF2B5EF4-FFF2-40B4-BE49-F238E27FC236}">
-                <a16:creationId xmlns:a16="http://schemas.microsoft.com/office/drawing/2014/main" id="{E5F66EA2-9488-43A1-8333-2D9785BC077C}"/>
-              </a:ext>
-            </a:extLst>
-          </p:cNvPr>
-          <p:cNvSpPr/>
+        </p:spPr>
+        <p:txBody>
+          <a:bodyPr wrap="none" rtlCol="0">
+            <a:spAutoFit/>
+          </a:bodyPr>
+          <a:lstStyle/>
+          <a:p>
+            <a:r>
+              <a:rPr kumimoji="1" lang="en-US" altLang="ja-JP" sz="2400" dirty="0"/>
+              <a:t>X</a:t>
+            </a:r>
+            <a:r>
+              <a:rPr kumimoji="1" lang="ja-JP" altLang="en-US" sz="2400" dirty="0"/>
+              <a:t>軸の処理を参考に、</a:t>
+            </a:r>
+            <a:r>
+              <a:rPr kumimoji="1" lang="en-US" altLang="ja-JP" sz="2400" dirty="0"/>
+              <a:t>Y</a:t>
+            </a:r>
+            <a:r>
+              <a:rPr kumimoji="1" lang="ja-JP" altLang="en-US" sz="2400" dirty="0"/>
+              <a:t>軸の押し出し処理を完成させましょう</a:t>
+            </a:r>
+            <a:endParaRPr kumimoji="1" lang="en-US" altLang="ja-JP" sz="2400" dirty="0"/>
+          </a:p>
+        </p:txBody>
+      </p:sp>
+      <p:pic>
+        <p:nvPicPr>
+          <p:cNvPr id="12" name="図 11">
+            <a:extLst>
+              <a:ext uri="{FF2B5EF4-FFF2-40B4-BE49-F238E27FC236}">
+                <a16:creationId xmlns:a16="http://schemas.microsoft.com/office/drawing/2014/main" id="{263A3845-4F99-4DC6-9E5F-7FE1B52A0A0A}"/>
+              </a:ext>
+            </a:extLst>
+          </p:cNvPr>
+          <p:cNvPicPr>
+            <a:picLocks noChangeAspect="1"/>
+          </p:cNvPicPr>
           <p:nvPr/>
-        </p:nvSpPr>
-        <p:spPr>
-          <a:xfrm>
-            <a:off x="2154586" y="5781182"/>
-            <a:ext cx="3409397" cy="131536"/>
+        </p:nvPicPr>
+        <p:blipFill>
+          <a:blip r:embed="rId2"/>
+          <a:stretch>
+            <a:fillRect/>
+          </a:stretch>
+        </p:blipFill>
+        <p:spPr>
+          <a:xfrm>
+            <a:off x="567542" y="1817794"/>
+            <a:ext cx="8794305" cy="4726939"/>
           </a:xfrm>
           <a:prstGeom prst="rect">
             <a:avLst/>
           </a:prstGeom>
-          <a:noFill/>
-          <a:ln w="38100">
-            <a:solidFill>
-              <a:srgbClr val="FF0000"/>
-            </a:solidFill>
-          </a:ln>
-        </p:spPr>
-        <p:style>
-          <a:lnRef idx="2">
-            <a:schemeClr val="accent1">
-              <a:shade val="50000"/>
-            </a:schemeClr>
-          </a:lnRef>
-          <a:fillRef idx="1">
-            <a:schemeClr val="accent1"/>
-          </a:fillRef>
-          <a:effectRef idx="0">
-            <a:schemeClr val="accent1"/>
-          </a:effectRef>
-          <a:fontRef idx="minor">
-            <a:schemeClr val="lt1"/>
-          </a:fontRef>
-        </p:style>
-        <p:txBody>
-          <a:bodyPr rtlCol="0" anchor="ctr"/>
-          <a:lstStyle/>
-          <a:p>
-            <a:pPr algn="ctr"/>
-            <a:endParaRPr kumimoji="1" lang="ja-JP" altLang="en-US"/>
-          </a:p>
-        </p:txBody>
-      </p:sp>
-      <p:sp>
-        <p:nvSpPr>
-          <p:cNvPr id="10" name="正方形/長方形 9">
-            <a:extLst>
-              <a:ext uri="{FF2B5EF4-FFF2-40B4-BE49-F238E27FC236}">
-                <a16:creationId xmlns:a16="http://schemas.microsoft.com/office/drawing/2014/main" id="{317B3304-26AC-4EFC-ADD8-4DDE5554AE33}"/>
-              </a:ext>
-            </a:extLst>
-          </p:cNvPr>
-          <p:cNvSpPr/>
-          <p:nvPr/>
-        </p:nvSpPr>
-        <p:spPr>
-          <a:xfrm>
-            <a:off x="2244233" y="5152331"/>
-            <a:ext cx="3409397" cy="131536"/>
-          </a:xfrm>
-          <a:prstGeom prst="rect">
-            <a:avLst/>
-          </a:prstGeom>
-          <a:noFill/>
-          <a:ln w="38100">
-            <a:solidFill>
-              <a:srgbClr val="FF0000"/>
-            </a:solidFill>
-          </a:ln>
-        </p:spPr>
-        <p:style>
-          <a:lnRef idx="2">
-            <a:schemeClr val="accent1">
-              <a:shade val="50000"/>
-            </a:schemeClr>
-          </a:lnRef>
-          <a:fillRef idx="1">
-            <a:schemeClr val="accent1"/>
-          </a:fillRef>
-          <a:effectRef idx="0">
-            <a:schemeClr val="accent1"/>
-          </a:effectRef>
-          <a:fontRef idx="minor">
-            <a:schemeClr val="lt1"/>
-          </a:fontRef>
-        </p:style>
-        <p:txBody>
-          <a:bodyPr rtlCol="0" anchor="ctr"/>
-          <a:lstStyle/>
-          <a:p>
-            <a:pPr algn="ctr"/>
-            <a:endParaRPr kumimoji="1" lang="ja-JP" altLang="en-US"/>
-          </a:p>
-        </p:txBody>
-      </p:sp>
+        </p:spPr>
+      </p:pic>
     </p:spTree>
     <p:extLst>
       <p:ext uri="{BB962C8B-B14F-4D97-AF65-F5344CB8AC3E}">
@@ -4708,7 +4632,7 @@
           <a:p>
             <a:r>
               <a:rPr lang="ja-JP" altLang="en-US" sz="1600" dirty="0"/>
-              <a:t>斜めに落ちているとすると。。</a:t>
+              <a:t>斜めに落ちていたとすると。。</a:t>
             </a:r>
             <a:endParaRPr kumimoji="1" lang="en-US" altLang="ja-JP" sz="1600" dirty="0"/>
           </a:p>
@@ -5569,7 +5493,7 @@
         <p:spPr>
           <a:xfrm>
             <a:off x="567542" y="1216429"/>
-            <a:ext cx="8581195" cy="461665"/>
+            <a:ext cx="10437473" cy="830997"/>
           </a:xfrm>
           <a:prstGeom prst="rect">
             <a:avLst/>
@@ -5583,36 +5507,55 @@
           <a:lstStyle/>
           <a:p>
             <a:r>
-              <a:rPr kumimoji="1" lang="en-US" altLang="ja-JP" sz="2400" b="1" dirty="0">
+              <a:rPr kumimoji="1" lang="ja-JP" altLang="en-US" sz="2400" dirty="0"/>
+              <a:t>当たり判定用の情報をまとめた</a:t>
+            </a:r>
+            <a:r>
+              <a:rPr kumimoji="1" lang="ja-JP" altLang="en-US" sz="2400" b="1" dirty="0">
+                <a:solidFill>
+                  <a:srgbClr val="00B050"/>
+                </a:solidFill>
+              </a:rPr>
+              <a:t>構造体</a:t>
+            </a:r>
+            <a:r>
+              <a:rPr lang="en-US" altLang="ja-JP" sz="2400" b="1" dirty="0">
+                <a:solidFill>
+                  <a:srgbClr val="00B050"/>
+                </a:solidFill>
+              </a:rPr>
+              <a:t>Body</a:t>
+            </a:r>
+            <a:r>
+              <a:rPr kumimoji="1" lang="ja-JP" altLang="en-US" sz="2400" dirty="0"/>
+              <a:t>を用意しました。</a:t>
+            </a:r>
+            <a:endParaRPr kumimoji="1" lang="en-US" altLang="ja-JP" sz="2400" dirty="0"/>
+          </a:p>
+          <a:p>
+            <a:r>
+              <a:rPr lang="ja-JP" altLang="en-US" sz="2400" dirty="0"/>
+              <a:t>これで</a:t>
+            </a:r>
+            <a:r>
+              <a:rPr lang="en-US" altLang="ja-JP" sz="2400" b="1" dirty="0">
                 <a:solidFill>
                   <a:srgbClr val="FF0000"/>
                 </a:solidFill>
               </a:rPr>
-              <a:t>Player.cpp</a:t>
-            </a:r>
-            <a:r>
-              <a:rPr kumimoji="1" lang="ja-JP" altLang="en-US" sz="2400" dirty="0"/>
-              <a:t>の</a:t>
-            </a:r>
-            <a:r>
-              <a:rPr kumimoji="1" lang="en-US" altLang="ja-JP" sz="2400" b="1" dirty="0" err="1">
+              <a:t>Body</a:t>
+            </a:r>
+            <a:r>
+              <a:rPr lang="ja-JP" altLang="en-US" sz="2400" b="1" dirty="0">
                 <a:solidFill>
-                  <a:srgbClr val="0070C0"/>
+                  <a:srgbClr val="FF0000"/>
                 </a:solidFill>
               </a:rPr>
-              <a:t>MovePlayerWithCollision</a:t>
-            </a:r>
-            <a:r>
-              <a:rPr kumimoji="1" lang="ja-JP" altLang="en-US" sz="2400" b="1" dirty="0">
-                <a:solidFill>
-                  <a:srgbClr val="0070C0"/>
-                </a:solidFill>
-              </a:rPr>
-              <a:t>関数</a:t>
-            </a:r>
-            <a:r>
-              <a:rPr kumimoji="1" lang="ja-JP" altLang="en-US" sz="2400" dirty="0"/>
-              <a:t>に実装します。</a:t>
+              <a:t>をもつもの全てが共通の当たり判定</a:t>
+            </a:r>
+            <a:r>
+              <a:rPr lang="ja-JP" altLang="en-US" sz="2400" dirty="0"/>
+              <a:t>でできるようになります。</a:t>
             </a:r>
             <a:endParaRPr kumimoji="1" lang="en-US" altLang="ja-JP" sz="2400" dirty="0"/>
           </a:p>
@@ -5623,7 +5566,7 @@
           <p:cNvPr id="3" name="図 2">
             <a:extLst>
               <a:ext uri="{FF2B5EF4-FFF2-40B4-BE49-F238E27FC236}">
-                <a16:creationId xmlns:a16="http://schemas.microsoft.com/office/drawing/2014/main" id="{49A9B504-E3FB-4ED8-AC78-865C842F0604}"/>
+                <a16:creationId xmlns:a16="http://schemas.microsoft.com/office/drawing/2014/main" id="{7A296715-347F-45B7-94AC-91B743554938}"/>
               </a:ext>
             </a:extLst>
           </p:cNvPr>
@@ -5640,8 +5583,8 @@
         </p:blipFill>
         <p:spPr>
           <a:xfrm>
-            <a:off x="567542" y="1817794"/>
-            <a:ext cx="8217870" cy="4417105"/>
+            <a:off x="567542" y="2187126"/>
+            <a:ext cx="8217440" cy="4416874"/>
           </a:xfrm>
           <a:prstGeom prst="rect">
             <a:avLst/>
@@ -5651,7 +5594,7 @@
     </p:spTree>
     <p:extLst>
       <p:ext uri="{BB962C8B-B14F-4D97-AF65-F5344CB8AC3E}">
-        <p14:creationId xmlns:p14="http://schemas.microsoft.com/office/powerpoint/2010/main" val="1816225910"/>
+        <p14:creationId xmlns:p14="http://schemas.microsoft.com/office/powerpoint/2010/main" val="3292871804"/>
       </p:ext>
     </p:extLst>
   </p:cSld>
@@ -5728,7 +5671,7 @@
         <p:spPr>
           <a:xfrm>
             <a:off x="567542" y="1216429"/>
-            <a:ext cx="6538970" cy="461665"/>
+            <a:ext cx="9337813" cy="461665"/>
           </a:xfrm>
           <a:prstGeom prst="rect">
             <a:avLst/>
@@ -5742,16 +5685,36 @@
           <a:lstStyle/>
           <a:p>
             <a:r>
+              <a:rPr kumimoji="1" lang="en-US" altLang="ja-JP" sz="2400" b="1" dirty="0">
+                <a:solidFill>
+                  <a:srgbClr val="FF0000"/>
+                </a:solidFill>
+              </a:rPr>
+              <a:t>MapManager.cpp</a:t>
+            </a:r>
+            <a:r>
               <a:rPr kumimoji="1" lang="ja-JP" altLang="en-US" sz="2400" dirty="0"/>
-              <a:t>まずは</a:t>
-            </a:r>
-            <a:r>
-              <a:rPr kumimoji="1" lang="en-US" altLang="ja-JP" sz="2400" dirty="0"/>
-              <a:t>X</a:t>
+              <a:t>の</a:t>
+            </a:r>
+            <a:r>
+              <a:rPr kumimoji="1" lang="en-US" altLang="ja-JP" sz="2400" b="1" dirty="0" err="1">
+                <a:solidFill>
+                  <a:srgbClr val="0070C0"/>
+                </a:solidFill>
+              </a:rPr>
+              <a:t>MoveWithMapCollision</a:t>
+            </a:r>
+            <a:r>
+              <a:rPr kumimoji="1" lang="ja-JP" altLang="en-US" sz="2400" b="1" dirty="0">
+                <a:solidFill>
+                  <a:srgbClr val="0070C0"/>
+                </a:solidFill>
+              </a:rPr>
+              <a:t>関数を</a:t>
             </a:r>
             <a:r>
               <a:rPr kumimoji="1" lang="ja-JP" altLang="en-US" sz="2400" dirty="0"/>
-              <a:t>軸だけ移動して当たり判定をします。</a:t>
+              <a:t>実装します。</a:t>
             </a:r>
             <a:endParaRPr kumimoji="1" lang="en-US" altLang="ja-JP" sz="2400" dirty="0"/>
           </a:p>
@@ -5759,10 +5722,10 @@
       </p:sp>
       <p:pic>
         <p:nvPicPr>
-          <p:cNvPr id="8" name="図 7">
-            <a:extLst>
-              <a:ext uri="{FF2B5EF4-FFF2-40B4-BE49-F238E27FC236}">
-                <a16:creationId xmlns:a16="http://schemas.microsoft.com/office/drawing/2014/main" id="{D153969A-A535-4B2F-9D76-FD6B454B78C6}"/>
+          <p:cNvPr id="5" name="図 4">
+            <a:extLst>
+              <a:ext uri="{FF2B5EF4-FFF2-40B4-BE49-F238E27FC236}">
+                <a16:creationId xmlns:a16="http://schemas.microsoft.com/office/drawing/2014/main" id="{D3204217-2770-4B78-A251-39728B64D0E3}"/>
               </a:ext>
             </a:extLst>
           </p:cNvPr>
@@ -5780,69 +5743,17 @@
         <p:spPr>
           <a:xfrm>
             <a:off x="567542" y="1817794"/>
-            <a:ext cx="9389156" cy="2216324"/>
+            <a:ext cx="8652658" cy="4650804"/>
           </a:xfrm>
           <a:prstGeom prst="rect">
             <a:avLst/>
           </a:prstGeom>
         </p:spPr>
       </p:pic>
-      <p:sp>
-        <p:nvSpPr>
-          <p:cNvPr id="9" name="正方形/長方形 8">
-            <a:extLst>
-              <a:ext uri="{FF2B5EF4-FFF2-40B4-BE49-F238E27FC236}">
-                <a16:creationId xmlns:a16="http://schemas.microsoft.com/office/drawing/2014/main" id="{0BC6572A-7AAF-47C1-8F06-5D4C5E794094}"/>
-              </a:ext>
-            </a:extLst>
-          </p:cNvPr>
-          <p:cNvSpPr/>
-          <p:nvPr/>
-        </p:nvSpPr>
-        <p:spPr>
-          <a:xfrm>
-            <a:off x="2402542" y="2151529"/>
-            <a:ext cx="6194611" cy="412377"/>
-          </a:xfrm>
-          <a:prstGeom prst="rect">
-            <a:avLst/>
-          </a:prstGeom>
-          <a:noFill/>
-          <a:ln w="38100">
-            <a:solidFill>
-              <a:srgbClr val="FF0000"/>
-            </a:solidFill>
-          </a:ln>
-        </p:spPr>
-        <p:style>
-          <a:lnRef idx="2">
-            <a:schemeClr val="accent1">
-              <a:shade val="50000"/>
-            </a:schemeClr>
-          </a:lnRef>
-          <a:fillRef idx="1">
-            <a:schemeClr val="accent1"/>
-          </a:fillRef>
-          <a:effectRef idx="0">
-            <a:schemeClr val="accent1"/>
-          </a:effectRef>
-          <a:fontRef idx="minor">
-            <a:schemeClr val="lt1"/>
-          </a:fontRef>
-        </p:style>
-        <p:txBody>
-          <a:bodyPr rtlCol="0" anchor="ctr"/>
-          <a:lstStyle/>
-          <a:p>
-            <a:pPr algn="ctr"/>
-            <a:endParaRPr kumimoji="1" lang="ja-JP" altLang="en-US"/>
-          </a:p>
-        </p:txBody>
-      </p:sp>
     </p:spTree>
     <p:extLst>
       <p:ext uri="{BB962C8B-B14F-4D97-AF65-F5344CB8AC3E}">
-        <p14:creationId xmlns:p14="http://schemas.microsoft.com/office/powerpoint/2010/main" val="1169838247"/>
+        <p14:creationId xmlns:p14="http://schemas.microsoft.com/office/powerpoint/2010/main" val="1816225910"/>
       </p:ext>
     </p:extLst>
   </p:cSld>
@@ -5919,7 +5830,7 @@
         <p:spPr>
           <a:xfrm>
             <a:off x="567542" y="1216429"/>
-            <a:ext cx="6955750" cy="461665"/>
+            <a:ext cx="6538970" cy="461665"/>
           </a:xfrm>
           <a:prstGeom prst="rect">
             <a:avLst/>
@@ -5933,41 +5844,77 @@
           <a:lstStyle/>
           <a:p>
             <a:r>
-              <a:rPr kumimoji="1" lang="ja-JP" altLang="en-US" sz="2400" b="1" dirty="0">
-                <a:solidFill>
-                  <a:srgbClr val="FF0000"/>
-                </a:solidFill>
-              </a:rPr>
-              <a:t>押し出す方向は移動方向とは逆方向</a:t>
-            </a:r>
-            <a:r>
               <a:rPr kumimoji="1" lang="ja-JP" altLang="en-US" sz="2400" dirty="0"/>
-              <a:t>になります。</a:t>
+              <a:t>まずは</a:t>
+            </a:r>
+            <a:r>
+              <a:rPr kumimoji="1" lang="en-US" altLang="ja-JP" sz="2400" dirty="0"/>
+              <a:t>X</a:t>
+            </a:r>
+            <a:r>
+              <a:rPr kumimoji="1" lang="ja-JP" altLang="en-US" sz="2400" dirty="0"/>
+              <a:t>軸だけ移動して当たり判定をします。</a:t>
             </a:r>
             <a:endParaRPr kumimoji="1" lang="en-US" altLang="ja-JP" sz="2400" dirty="0"/>
           </a:p>
         </p:txBody>
       </p:sp>
-      <p:sp>
-        <p:nvSpPr>
-          <p:cNvPr id="7" name="正方形/長方形 6">
-            <a:extLst>
-              <a:ext uri="{FF2B5EF4-FFF2-40B4-BE49-F238E27FC236}">
-                <a16:creationId xmlns:a16="http://schemas.microsoft.com/office/drawing/2014/main" id="{94E40B75-DF31-4048-B0CF-8C78163304DD}"/>
-              </a:ext>
-            </a:extLst>
-          </p:cNvPr>
-          <p:cNvSpPr/>
+      <p:pic>
+        <p:nvPicPr>
+          <p:cNvPr id="3" name="図 2">
+            <a:extLst>
+              <a:ext uri="{FF2B5EF4-FFF2-40B4-BE49-F238E27FC236}">
+                <a16:creationId xmlns:a16="http://schemas.microsoft.com/office/drawing/2014/main" id="{020292C0-76BD-4970-A667-91739A160A72}"/>
+              </a:ext>
+            </a:extLst>
+          </p:cNvPr>
+          <p:cNvPicPr>
+            <a:picLocks noChangeAspect="1"/>
+          </p:cNvPicPr>
           <p:nvPr/>
-        </p:nvSpPr>
-        <p:spPr>
-          <a:xfrm>
-            <a:off x="1252759" y="2745564"/>
-            <a:ext cx="1080000" cy="1080000"/>
+        </p:nvPicPr>
+        <p:blipFill>
+          <a:blip r:embed="rId2"/>
+          <a:stretch>
+            <a:fillRect/>
+          </a:stretch>
+        </p:blipFill>
+        <p:spPr>
+          <a:xfrm>
+            <a:off x="571450" y="1817793"/>
+            <a:ext cx="8005120" cy="2415539"/>
           </a:xfrm>
           <a:prstGeom prst="rect">
             <a:avLst/>
           </a:prstGeom>
+        </p:spPr>
+      </p:pic>
+      <p:sp>
+        <p:nvSpPr>
+          <p:cNvPr id="10" name="正方形/長方形 9">
+            <a:extLst>
+              <a:ext uri="{FF2B5EF4-FFF2-40B4-BE49-F238E27FC236}">
+                <a16:creationId xmlns:a16="http://schemas.microsoft.com/office/drawing/2014/main" id="{8862C705-4371-4F00-BF68-ABADF92688B4}"/>
+              </a:ext>
+            </a:extLst>
+          </p:cNvPr>
+          <p:cNvSpPr/>
+          <p:nvPr/>
+        </p:nvSpPr>
+        <p:spPr>
+          <a:xfrm>
+            <a:off x="2220438" y="3316940"/>
+            <a:ext cx="3773962" cy="747059"/>
+          </a:xfrm>
+          <a:prstGeom prst="rect">
+            <a:avLst/>
+          </a:prstGeom>
+          <a:noFill/>
+          <a:ln w="38100">
+            <a:solidFill>
+              <a:srgbClr val="FF0000"/>
+            </a:solidFill>
+          </a:ln>
         </p:spPr>
         <p:style>
           <a:lnRef idx="2">
@@ -5994,581 +5941,10 @@
           </a:p>
         </p:txBody>
       </p:sp>
-      <p:sp>
-        <p:nvSpPr>
-          <p:cNvPr id="10" name="スマイル 9">
-            <a:extLst>
-              <a:ext uri="{FF2B5EF4-FFF2-40B4-BE49-F238E27FC236}">
-                <a16:creationId xmlns:a16="http://schemas.microsoft.com/office/drawing/2014/main" id="{9FF65E0B-146C-4DD4-8793-363A18F36F09}"/>
-              </a:ext>
-            </a:extLst>
-          </p:cNvPr>
-          <p:cNvSpPr/>
-          <p:nvPr/>
-        </p:nvSpPr>
-        <p:spPr>
-          <a:xfrm>
-            <a:off x="567542" y="2745564"/>
-            <a:ext cx="1080000" cy="1080000"/>
-          </a:xfrm>
-          <a:prstGeom prst="smileyFace">
-            <a:avLst/>
-          </a:prstGeom>
-        </p:spPr>
-        <p:style>
-          <a:lnRef idx="2">
-            <a:schemeClr val="accent4">
-              <a:shade val="50000"/>
-            </a:schemeClr>
-          </a:lnRef>
-          <a:fillRef idx="1">
-            <a:schemeClr val="accent4"/>
-          </a:fillRef>
-          <a:effectRef idx="0">
-            <a:schemeClr val="accent4"/>
-          </a:effectRef>
-          <a:fontRef idx="minor">
-            <a:schemeClr val="lt1"/>
-          </a:fontRef>
-        </p:style>
-        <p:txBody>
-          <a:bodyPr rtlCol="0" anchor="ctr"/>
-          <a:lstStyle/>
-          <a:p>
-            <a:pPr algn="ctr"/>
-            <a:endParaRPr kumimoji="1" lang="ja-JP" altLang="en-US"/>
-          </a:p>
-        </p:txBody>
-      </p:sp>
-      <p:cxnSp>
-        <p:nvCxnSpPr>
-          <p:cNvPr id="11" name="直線矢印コネクタ 10">
-            <a:extLst>
-              <a:ext uri="{FF2B5EF4-FFF2-40B4-BE49-F238E27FC236}">
-                <a16:creationId xmlns:a16="http://schemas.microsoft.com/office/drawing/2014/main" id="{15D01992-EE28-44E9-AD5B-B95B4766F786}"/>
-              </a:ext>
-            </a:extLst>
-          </p:cNvPr>
-          <p:cNvCxnSpPr>
-            <a:cxnSpLocks/>
-          </p:cNvCxnSpPr>
-          <p:nvPr/>
-        </p:nvCxnSpPr>
-        <p:spPr>
-          <a:xfrm>
-            <a:off x="615054" y="2619787"/>
-            <a:ext cx="1080000" cy="0"/>
-          </a:xfrm>
-          <a:prstGeom prst="straightConnector1">
-            <a:avLst/>
-          </a:prstGeom>
-          <a:ln w="38100">
-            <a:solidFill>
-              <a:srgbClr val="FF0000"/>
-            </a:solidFill>
-            <a:tailEnd type="triangle"/>
-          </a:ln>
-        </p:spPr>
-        <p:style>
-          <a:lnRef idx="1">
-            <a:schemeClr val="accent1"/>
-          </a:lnRef>
-          <a:fillRef idx="0">
-            <a:schemeClr val="accent1"/>
-          </a:fillRef>
-          <a:effectRef idx="0">
-            <a:schemeClr val="accent1"/>
-          </a:effectRef>
-          <a:fontRef idx="minor">
-            <a:schemeClr val="tx1"/>
-          </a:fontRef>
-        </p:style>
-      </p:cxnSp>
-      <p:sp>
-        <p:nvSpPr>
-          <p:cNvPr id="12" name="正方形/長方形 11">
-            <a:extLst>
-              <a:ext uri="{FF2B5EF4-FFF2-40B4-BE49-F238E27FC236}">
-                <a16:creationId xmlns:a16="http://schemas.microsoft.com/office/drawing/2014/main" id="{FC046687-9F6F-44AB-A9FD-0304C4495776}"/>
-              </a:ext>
-            </a:extLst>
-          </p:cNvPr>
-          <p:cNvSpPr/>
-          <p:nvPr/>
-        </p:nvSpPr>
-        <p:spPr>
-          <a:xfrm>
-            <a:off x="4157324" y="2745564"/>
-            <a:ext cx="1080000" cy="1080000"/>
-          </a:xfrm>
-          <a:prstGeom prst="rect">
-            <a:avLst/>
-          </a:prstGeom>
-        </p:spPr>
-        <p:style>
-          <a:lnRef idx="2">
-            <a:schemeClr val="accent1">
-              <a:shade val="50000"/>
-            </a:schemeClr>
-          </a:lnRef>
-          <a:fillRef idx="1">
-            <a:schemeClr val="accent1"/>
-          </a:fillRef>
-          <a:effectRef idx="0">
-            <a:schemeClr val="accent1"/>
-          </a:effectRef>
-          <a:fontRef idx="minor">
-            <a:schemeClr val="lt1"/>
-          </a:fontRef>
-        </p:style>
-        <p:txBody>
-          <a:bodyPr rtlCol="0" anchor="ctr"/>
-          <a:lstStyle/>
-          <a:p>
-            <a:pPr algn="ctr"/>
-            <a:endParaRPr kumimoji="1" lang="ja-JP" altLang="en-US"/>
-          </a:p>
-        </p:txBody>
-      </p:sp>
-      <p:sp>
-        <p:nvSpPr>
-          <p:cNvPr id="13" name="スマイル 12">
-            <a:extLst>
-              <a:ext uri="{FF2B5EF4-FFF2-40B4-BE49-F238E27FC236}">
-                <a16:creationId xmlns:a16="http://schemas.microsoft.com/office/drawing/2014/main" id="{EA10F951-05B9-4805-B573-CA6A33699461}"/>
-              </a:ext>
-            </a:extLst>
-          </p:cNvPr>
-          <p:cNvSpPr/>
-          <p:nvPr/>
-        </p:nvSpPr>
-        <p:spPr>
-          <a:xfrm>
-            <a:off x="3077324" y="2745564"/>
-            <a:ext cx="1080000" cy="1080000"/>
-          </a:xfrm>
-          <a:prstGeom prst="smileyFace">
-            <a:avLst/>
-          </a:prstGeom>
-        </p:spPr>
-        <p:style>
-          <a:lnRef idx="2">
-            <a:schemeClr val="accent4">
-              <a:shade val="50000"/>
-            </a:schemeClr>
-          </a:lnRef>
-          <a:fillRef idx="1">
-            <a:schemeClr val="accent4"/>
-          </a:fillRef>
-          <a:effectRef idx="0">
-            <a:schemeClr val="accent4"/>
-          </a:effectRef>
-          <a:fontRef idx="minor">
-            <a:schemeClr val="lt1"/>
-          </a:fontRef>
-        </p:style>
-        <p:txBody>
-          <a:bodyPr rtlCol="0" anchor="ctr"/>
-          <a:lstStyle/>
-          <a:p>
-            <a:pPr algn="ctr"/>
-            <a:endParaRPr kumimoji="1" lang="ja-JP" altLang="en-US"/>
-          </a:p>
-        </p:txBody>
-      </p:sp>
-      <p:cxnSp>
-        <p:nvCxnSpPr>
-          <p:cNvPr id="14" name="直線矢印コネクタ 13">
-            <a:extLst>
-              <a:ext uri="{FF2B5EF4-FFF2-40B4-BE49-F238E27FC236}">
-                <a16:creationId xmlns:a16="http://schemas.microsoft.com/office/drawing/2014/main" id="{9941DEC1-38A9-47E8-8A84-1570A381927F}"/>
-              </a:ext>
-            </a:extLst>
-          </p:cNvPr>
-          <p:cNvCxnSpPr>
-            <a:cxnSpLocks/>
-          </p:cNvCxnSpPr>
-          <p:nvPr/>
-        </p:nvCxnSpPr>
-        <p:spPr>
-          <a:xfrm flipH="1">
-            <a:off x="4157324" y="3278692"/>
-            <a:ext cx="420616" cy="0"/>
-          </a:xfrm>
-          <a:prstGeom prst="straightConnector1">
-            <a:avLst/>
-          </a:prstGeom>
-          <a:ln w="38100">
-            <a:solidFill>
-              <a:srgbClr val="FF0000"/>
-            </a:solidFill>
-            <a:tailEnd type="triangle"/>
-          </a:ln>
-        </p:spPr>
-        <p:style>
-          <a:lnRef idx="1">
-            <a:schemeClr val="accent1"/>
-          </a:lnRef>
-          <a:fillRef idx="0">
-            <a:schemeClr val="accent1"/>
-          </a:fillRef>
-          <a:effectRef idx="0">
-            <a:schemeClr val="accent1"/>
-          </a:effectRef>
-          <a:fontRef idx="minor">
-            <a:schemeClr val="tx1"/>
-          </a:fontRef>
-        </p:style>
-      </p:cxnSp>
-      <p:sp>
-        <p:nvSpPr>
-          <p:cNvPr id="15" name="正方形/長方形 14">
-            <a:extLst>
-              <a:ext uri="{FF2B5EF4-FFF2-40B4-BE49-F238E27FC236}">
-                <a16:creationId xmlns:a16="http://schemas.microsoft.com/office/drawing/2014/main" id="{C1A405E4-760E-473F-AF12-CDF045B2E3C1}"/>
-              </a:ext>
-            </a:extLst>
-          </p:cNvPr>
-          <p:cNvSpPr/>
-          <p:nvPr/>
-        </p:nvSpPr>
-        <p:spPr>
-          <a:xfrm>
-            <a:off x="712759" y="5286046"/>
-            <a:ext cx="1080000" cy="1080000"/>
-          </a:xfrm>
-          <a:prstGeom prst="rect">
-            <a:avLst/>
-          </a:prstGeom>
-        </p:spPr>
-        <p:style>
-          <a:lnRef idx="2">
-            <a:schemeClr val="accent1">
-              <a:shade val="50000"/>
-            </a:schemeClr>
-          </a:lnRef>
-          <a:fillRef idx="1">
-            <a:schemeClr val="accent1"/>
-          </a:fillRef>
-          <a:effectRef idx="0">
-            <a:schemeClr val="accent1"/>
-          </a:effectRef>
-          <a:fontRef idx="minor">
-            <a:schemeClr val="lt1"/>
-          </a:fontRef>
-        </p:style>
-        <p:txBody>
-          <a:bodyPr rtlCol="0" anchor="ctr"/>
-          <a:lstStyle/>
-          <a:p>
-            <a:pPr algn="ctr"/>
-            <a:endParaRPr kumimoji="1" lang="ja-JP" altLang="en-US"/>
-          </a:p>
-        </p:txBody>
-      </p:sp>
-      <p:sp>
-        <p:nvSpPr>
-          <p:cNvPr id="16" name="スマイル 15">
-            <a:extLst>
-              <a:ext uri="{FF2B5EF4-FFF2-40B4-BE49-F238E27FC236}">
-                <a16:creationId xmlns:a16="http://schemas.microsoft.com/office/drawing/2014/main" id="{5BACB2FC-BAC3-46A0-865D-1EBBC1A17997}"/>
-              </a:ext>
-            </a:extLst>
-          </p:cNvPr>
-          <p:cNvSpPr/>
-          <p:nvPr/>
-        </p:nvSpPr>
-        <p:spPr>
-          <a:xfrm>
-            <a:off x="1409812" y="5279174"/>
-            <a:ext cx="1080000" cy="1080000"/>
-          </a:xfrm>
-          <a:prstGeom prst="smileyFace">
-            <a:avLst/>
-          </a:prstGeom>
-        </p:spPr>
-        <p:style>
-          <a:lnRef idx="2">
-            <a:schemeClr val="accent4">
-              <a:shade val="50000"/>
-            </a:schemeClr>
-          </a:lnRef>
-          <a:fillRef idx="1">
-            <a:schemeClr val="accent4"/>
-          </a:fillRef>
-          <a:effectRef idx="0">
-            <a:schemeClr val="accent4"/>
-          </a:effectRef>
-          <a:fontRef idx="minor">
-            <a:schemeClr val="lt1"/>
-          </a:fontRef>
-        </p:style>
-        <p:txBody>
-          <a:bodyPr rtlCol="0" anchor="ctr"/>
-          <a:lstStyle/>
-          <a:p>
-            <a:pPr algn="ctr"/>
-            <a:endParaRPr kumimoji="1" lang="ja-JP" altLang="en-US"/>
-          </a:p>
-        </p:txBody>
-      </p:sp>
-      <p:cxnSp>
-        <p:nvCxnSpPr>
-          <p:cNvPr id="17" name="直線矢印コネクタ 16">
-            <a:extLst>
-              <a:ext uri="{FF2B5EF4-FFF2-40B4-BE49-F238E27FC236}">
-                <a16:creationId xmlns:a16="http://schemas.microsoft.com/office/drawing/2014/main" id="{B90F5C67-478C-40A0-9B3B-FD6766602A26}"/>
-              </a:ext>
-            </a:extLst>
-          </p:cNvPr>
-          <p:cNvCxnSpPr>
-            <a:cxnSpLocks/>
-          </p:cNvCxnSpPr>
-          <p:nvPr/>
-        </p:nvCxnSpPr>
-        <p:spPr>
-          <a:xfrm flipH="1">
-            <a:off x="1409812" y="5178199"/>
-            <a:ext cx="1080000" cy="0"/>
-          </a:xfrm>
-          <a:prstGeom prst="straightConnector1">
-            <a:avLst/>
-          </a:prstGeom>
-          <a:ln w="38100">
-            <a:solidFill>
-              <a:srgbClr val="FF0000"/>
-            </a:solidFill>
-            <a:tailEnd type="triangle"/>
-          </a:ln>
-        </p:spPr>
-        <p:style>
-          <a:lnRef idx="1">
-            <a:schemeClr val="accent1"/>
-          </a:lnRef>
-          <a:fillRef idx="0">
-            <a:schemeClr val="accent1"/>
-          </a:fillRef>
-          <a:effectRef idx="0">
-            <a:schemeClr val="accent1"/>
-          </a:effectRef>
-          <a:fontRef idx="minor">
-            <a:schemeClr val="tx1"/>
-          </a:fontRef>
-        </p:style>
-      </p:cxnSp>
-      <p:sp>
-        <p:nvSpPr>
-          <p:cNvPr id="18" name="正方形/長方形 17">
-            <a:extLst>
-              <a:ext uri="{FF2B5EF4-FFF2-40B4-BE49-F238E27FC236}">
-                <a16:creationId xmlns:a16="http://schemas.microsoft.com/office/drawing/2014/main" id="{B71DF198-CF83-43A6-AE16-94634D6692AF}"/>
-              </a:ext>
-            </a:extLst>
-          </p:cNvPr>
-          <p:cNvSpPr/>
-          <p:nvPr/>
-        </p:nvSpPr>
-        <p:spPr>
-          <a:xfrm>
-            <a:off x="3617324" y="5286046"/>
-            <a:ext cx="1080000" cy="1080000"/>
-          </a:xfrm>
-          <a:prstGeom prst="rect">
-            <a:avLst/>
-          </a:prstGeom>
-        </p:spPr>
-        <p:style>
-          <a:lnRef idx="2">
-            <a:schemeClr val="accent1">
-              <a:shade val="50000"/>
-            </a:schemeClr>
-          </a:lnRef>
-          <a:fillRef idx="1">
-            <a:schemeClr val="accent1"/>
-          </a:fillRef>
-          <a:effectRef idx="0">
-            <a:schemeClr val="accent1"/>
-          </a:effectRef>
-          <a:fontRef idx="minor">
-            <a:schemeClr val="lt1"/>
-          </a:fontRef>
-        </p:style>
-        <p:txBody>
-          <a:bodyPr rtlCol="0" anchor="ctr"/>
-          <a:lstStyle/>
-          <a:p>
-            <a:pPr algn="ctr"/>
-            <a:endParaRPr kumimoji="1" lang="ja-JP" altLang="en-US"/>
-          </a:p>
-        </p:txBody>
-      </p:sp>
-      <p:sp>
-        <p:nvSpPr>
-          <p:cNvPr id="19" name="スマイル 18">
-            <a:extLst>
-              <a:ext uri="{FF2B5EF4-FFF2-40B4-BE49-F238E27FC236}">
-                <a16:creationId xmlns:a16="http://schemas.microsoft.com/office/drawing/2014/main" id="{121EB491-1C6A-4B07-AA71-0BAEB0E30313}"/>
-              </a:ext>
-            </a:extLst>
-          </p:cNvPr>
-          <p:cNvSpPr/>
-          <p:nvPr/>
-        </p:nvSpPr>
-        <p:spPr>
-          <a:xfrm>
-            <a:off x="4697324" y="5286046"/>
-            <a:ext cx="1080000" cy="1080000"/>
-          </a:xfrm>
-          <a:prstGeom prst="smileyFace">
-            <a:avLst/>
-          </a:prstGeom>
-        </p:spPr>
-        <p:style>
-          <a:lnRef idx="2">
-            <a:schemeClr val="accent4">
-              <a:shade val="50000"/>
-            </a:schemeClr>
-          </a:lnRef>
-          <a:fillRef idx="1">
-            <a:schemeClr val="accent4"/>
-          </a:fillRef>
-          <a:effectRef idx="0">
-            <a:schemeClr val="accent4"/>
-          </a:effectRef>
-          <a:fontRef idx="minor">
-            <a:schemeClr val="lt1"/>
-          </a:fontRef>
-        </p:style>
-        <p:txBody>
-          <a:bodyPr rtlCol="0" anchor="ctr"/>
-          <a:lstStyle/>
-          <a:p>
-            <a:pPr algn="ctr"/>
-            <a:endParaRPr kumimoji="1" lang="ja-JP" altLang="en-US"/>
-          </a:p>
-        </p:txBody>
-      </p:sp>
-      <p:cxnSp>
-        <p:nvCxnSpPr>
-          <p:cNvPr id="20" name="直線矢印コネクタ 19">
-            <a:extLst>
-              <a:ext uri="{FF2B5EF4-FFF2-40B4-BE49-F238E27FC236}">
-                <a16:creationId xmlns:a16="http://schemas.microsoft.com/office/drawing/2014/main" id="{84CF157D-C547-4900-BB4E-8BFEA1B58EE7}"/>
-              </a:ext>
-            </a:extLst>
-          </p:cNvPr>
-          <p:cNvCxnSpPr>
-            <a:cxnSpLocks/>
-            <a:endCxn id="19" idx="2"/>
-          </p:cNvCxnSpPr>
-          <p:nvPr/>
-        </p:nvCxnSpPr>
-        <p:spPr>
-          <a:xfrm>
-            <a:off x="4314377" y="5819174"/>
-            <a:ext cx="382947" cy="6872"/>
-          </a:xfrm>
-          <a:prstGeom prst="straightConnector1">
-            <a:avLst/>
-          </a:prstGeom>
-          <a:ln w="38100">
-            <a:solidFill>
-              <a:srgbClr val="FF0000"/>
-            </a:solidFill>
-            <a:tailEnd type="triangle"/>
-          </a:ln>
-        </p:spPr>
-        <p:style>
-          <a:lnRef idx="1">
-            <a:schemeClr val="accent1"/>
-          </a:lnRef>
-          <a:fillRef idx="0">
-            <a:schemeClr val="accent1"/>
-          </a:fillRef>
-          <a:effectRef idx="0">
-            <a:schemeClr val="accent1"/>
-          </a:effectRef>
-          <a:fontRef idx="minor">
-            <a:schemeClr val="tx1"/>
-          </a:fontRef>
-        </p:style>
-      </p:cxnSp>
-      <p:sp>
-        <p:nvSpPr>
-          <p:cNvPr id="23" name="テキスト ボックス 22">
-            <a:extLst>
-              <a:ext uri="{FF2B5EF4-FFF2-40B4-BE49-F238E27FC236}">
-                <a16:creationId xmlns:a16="http://schemas.microsoft.com/office/drawing/2014/main" id="{7411E7DD-C430-43EE-A4CB-3CE3D4A288EC}"/>
-              </a:ext>
-            </a:extLst>
-          </p:cNvPr>
-          <p:cNvSpPr txBox="1"/>
-          <p:nvPr/>
-        </p:nvSpPr>
-        <p:spPr>
-          <a:xfrm>
-            <a:off x="567542" y="2112863"/>
-            <a:ext cx="3185487" cy="369332"/>
-          </a:xfrm>
-          <a:prstGeom prst="rect">
-            <a:avLst/>
-          </a:prstGeom>
-          <a:noFill/>
-        </p:spPr>
-        <p:txBody>
-          <a:bodyPr wrap="none" rtlCol="0">
-            <a:spAutoFit/>
-          </a:bodyPr>
-          <a:lstStyle/>
-          <a:p>
-            <a:r>
-              <a:rPr kumimoji="1" lang="ja-JP" altLang="en-US" dirty="0"/>
-              <a:t>■右に移動中に当たった場合</a:t>
-            </a:r>
-            <a:endParaRPr kumimoji="1" lang="en-US" altLang="ja-JP" dirty="0"/>
-          </a:p>
-        </p:txBody>
-      </p:sp>
-      <p:sp>
-        <p:nvSpPr>
-          <p:cNvPr id="24" name="テキスト ボックス 23">
-            <a:extLst>
-              <a:ext uri="{FF2B5EF4-FFF2-40B4-BE49-F238E27FC236}">
-                <a16:creationId xmlns:a16="http://schemas.microsoft.com/office/drawing/2014/main" id="{C465B35D-931A-4DE7-865F-491D4D87E1D5}"/>
-              </a:ext>
-            </a:extLst>
-          </p:cNvPr>
-          <p:cNvSpPr txBox="1"/>
-          <p:nvPr/>
-        </p:nvSpPr>
-        <p:spPr>
-          <a:xfrm>
-            <a:off x="567541" y="4678125"/>
-            <a:ext cx="3185487" cy="369332"/>
-          </a:xfrm>
-          <a:prstGeom prst="rect">
-            <a:avLst/>
-          </a:prstGeom>
-          <a:noFill/>
-        </p:spPr>
-        <p:txBody>
-          <a:bodyPr wrap="none" rtlCol="0">
-            <a:spAutoFit/>
-          </a:bodyPr>
-          <a:lstStyle/>
-          <a:p>
-            <a:r>
-              <a:rPr kumimoji="1" lang="ja-JP" altLang="en-US" dirty="0"/>
-              <a:t>■左に移動中に当たった場合</a:t>
-            </a:r>
-            <a:endParaRPr kumimoji="1" lang="en-US" altLang="ja-JP" dirty="0"/>
-          </a:p>
-        </p:txBody>
-      </p:sp>
     </p:spTree>
     <p:extLst>
       <p:ext uri="{BB962C8B-B14F-4D97-AF65-F5344CB8AC3E}">
-        <p14:creationId xmlns:p14="http://schemas.microsoft.com/office/powerpoint/2010/main" val="4079340338"/>
+        <p14:creationId xmlns:p14="http://schemas.microsoft.com/office/powerpoint/2010/main" val="1169838247"/>
       </p:ext>
     </p:extLst>
   </p:cSld>
@@ -6645,7 +6021,7 @@
         <p:spPr>
           <a:xfrm>
             <a:off x="567542" y="1216429"/>
-            <a:ext cx="5416868" cy="461665"/>
+            <a:ext cx="6955750" cy="461665"/>
           </a:xfrm>
           <a:prstGeom prst="rect">
             <a:avLst/>
@@ -6659,49 +6035,572 @@
           <a:lstStyle/>
           <a:p>
             <a:r>
+              <a:rPr kumimoji="1" lang="ja-JP" altLang="en-US" sz="2400" b="1" dirty="0">
+                <a:solidFill>
+                  <a:srgbClr val="FF0000"/>
+                </a:solidFill>
+              </a:rPr>
+              <a:t>押し出す方向は移動方向とは逆方向</a:t>
+            </a:r>
+            <a:r>
               <a:rPr kumimoji="1" lang="ja-JP" altLang="en-US" sz="2400" dirty="0"/>
-              <a:t>よく考えて空白を埋めてみましょう。</a:t>
+              <a:t>になります。</a:t>
             </a:r>
             <a:endParaRPr kumimoji="1" lang="en-US" altLang="ja-JP" sz="2400" dirty="0"/>
           </a:p>
         </p:txBody>
       </p:sp>
-      <p:pic>
-        <p:nvPicPr>
-          <p:cNvPr id="3" name="図 2">
-            <a:extLst>
-              <a:ext uri="{FF2B5EF4-FFF2-40B4-BE49-F238E27FC236}">
-                <a16:creationId xmlns:a16="http://schemas.microsoft.com/office/drawing/2014/main" id="{06D6FA8C-9740-432B-9C5C-E1110D55C441}"/>
-              </a:ext>
-            </a:extLst>
-          </p:cNvPr>
-          <p:cNvPicPr>
-            <a:picLocks noChangeAspect="1"/>
-          </p:cNvPicPr>
+      <p:sp>
+        <p:nvSpPr>
+          <p:cNvPr id="7" name="正方形/長方形 6">
+            <a:extLst>
+              <a:ext uri="{FF2B5EF4-FFF2-40B4-BE49-F238E27FC236}">
+                <a16:creationId xmlns:a16="http://schemas.microsoft.com/office/drawing/2014/main" id="{94E40B75-DF31-4048-B0CF-8C78163304DD}"/>
+              </a:ext>
+            </a:extLst>
+          </p:cNvPr>
+          <p:cNvSpPr/>
           <p:nvPr/>
-        </p:nvPicPr>
-        <p:blipFill>
-          <a:blip r:embed="rId2"/>
-          <a:stretch>
-            <a:fillRect/>
-          </a:stretch>
-        </p:blipFill>
-        <p:spPr>
-          <a:xfrm>
-            <a:off x="567542" y="1817794"/>
-            <a:ext cx="7478169" cy="2896004"/>
+        </p:nvSpPr>
+        <p:spPr>
+          <a:xfrm>
+            <a:off x="1252759" y="2745564"/>
+            <a:ext cx="1080000" cy="1080000"/>
           </a:xfrm>
           <a:prstGeom prst="rect">
             <a:avLst/>
           </a:prstGeom>
         </p:spPr>
-      </p:pic>
-      <p:sp>
-        <p:nvSpPr>
-          <p:cNvPr id="21" name="テキスト ボックス 20">
-            <a:extLst>
-              <a:ext uri="{FF2B5EF4-FFF2-40B4-BE49-F238E27FC236}">
-                <a16:creationId xmlns:a16="http://schemas.microsoft.com/office/drawing/2014/main" id="{F1087DC1-65C6-4EDF-A449-28A7B6474015}"/>
+        <p:style>
+          <a:lnRef idx="2">
+            <a:schemeClr val="accent1">
+              <a:shade val="50000"/>
+            </a:schemeClr>
+          </a:lnRef>
+          <a:fillRef idx="1">
+            <a:schemeClr val="accent1"/>
+          </a:fillRef>
+          <a:effectRef idx="0">
+            <a:schemeClr val="accent1"/>
+          </a:effectRef>
+          <a:fontRef idx="minor">
+            <a:schemeClr val="lt1"/>
+          </a:fontRef>
+        </p:style>
+        <p:txBody>
+          <a:bodyPr rtlCol="0" anchor="ctr"/>
+          <a:lstStyle/>
+          <a:p>
+            <a:pPr algn="ctr"/>
+            <a:endParaRPr kumimoji="1" lang="ja-JP" altLang="en-US"/>
+          </a:p>
+        </p:txBody>
+      </p:sp>
+      <p:sp>
+        <p:nvSpPr>
+          <p:cNvPr id="10" name="スマイル 9">
+            <a:extLst>
+              <a:ext uri="{FF2B5EF4-FFF2-40B4-BE49-F238E27FC236}">
+                <a16:creationId xmlns:a16="http://schemas.microsoft.com/office/drawing/2014/main" id="{9FF65E0B-146C-4DD4-8793-363A18F36F09}"/>
+              </a:ext>
+            </a:extLst>
+          </p:cNvPr>
+          <p:cNvSpPr/>
+          <p:nvPr/>
+        </p:nvSpPr>
+        <p:spPr>
+          <a:xfrm>
+            <a:off x="567542" y="2745564"/>
+            <a:ext cx="1080000" cy="1080000"/>
+          </a:xfrm>
+          <a:prstGeom prst="smileyFace">
+            <a:avLst/>
+          </a:prstGeom>
+        </p:spPr>
+        <p:style>
+          <a:lnRef idx="2">
+            <a:schemeClr val="accent4">
+              <a:shade val="50000"/>
+            </a:schemeClr>
+          </a:lnRef>
+          <a:fillRef idx="1">
+            <a:schemeClr val="accent4"/>
+          </a:fillRef>
+          <a:effectRef idx="0">
+            <a:schemeClr val="accent4"/>
+          </a:effectRef>
+          <a:fontRef idx="minor">
+            <a:schemeClr val="lt1"/>
+          </a:fontRef>
+        </p:style>
+        <p:txBody>
+          <a:bodyPr rtlCol="0" anchor="ctr"/>
+          <a:lstStyle/>
+          <a:p>
+            <a:pPr algn="ctr"/>
+            <a:endParaRPr kumimoji="1" lang="ja-JP" altLang="en-US"/>
+          </a:p>
+        </p:txBody>
+      </p:sp>
+      <p:cxnSp>
+        <p:nvCxnSpPr>
+          <p:cNvPr id="11" name="直線矢印コネクタ 10">
+            <a:extLst>
+              <a:ext uri="{FF2B5EF4-FFF2-40B4-BE49-F238E27FC236}">
+                <a16:creationId xmlns:a16="http://schemas.microsoft.com/office/drawing/2014/main" id="{15D01992-EE28-44E9-AD5B-B95B4766F786}"/>
+              </a:ext>
+            </a:extLst>
+          </p:cNvPr>
+          <p:cNvCxnSpPr>
+            <a:cxnSpLocks/>
+          </p:cNvCxnSpPr>
+          <p:nvPr/>
+        </p:nvCxnSpPr>
+        <p:spPr>
+          <a:xfrm>
+            <a:off x="615054" y="2619787"/>
+            <a:ext cx="1080000" cy="0"/>
+          </a:xfrm>
+          <a:prstGeom prst="straightConnector1">
+            <a:avLst/>
+          </a:prstGeom>
+          <a:ln w="38100">
+            <a:solidFill>
+              <a:srgbClr val="FF0000"/>
+            </a:solidFill>
+            <a:tailEnd type="triangle"/>
+          </a:ln>
+        </p:spPr>
+        <p:style>
+          <a:lnRef idx="1">
+            <a:schemeClr val="accent1"/>
+          </a:lnRef>
+          <a:fillRef idx="0">
+            <a:schemeClr val="accent1"/>
+          </a:fillRef>
+          <a:effectRef idx="0">
+            <a:schemeClr val="accent1"/>
+          </a:effectRef>
+          <a:fontRef idx="minor">
+            <a:schemeClr val="tx1"/>
+          </a:fontRef>
+        </p:style>
+      </p:cxnSp>
+      <p:sp>
+        <p:nvSpPr>
+          <p:cNvPr id="12" name="正方形/長方形 11">
+            <a:extLst>
+              <a:ext uri="{FF2B5EF4-FFF2-40B4-BE49-F238E27FC236}">
+                <a16:creationId xmlns:a16="http://schemas.microsoft.com/office/drawing/2014/main" id="{FC046687-9F6F-44AB-A9FD-0304C4495776}"/>
+              </a:ext>
+            </a:extLst>
+          </p:cNvPr>
+          <p:cNvSpPr/>
+          <p:nvPr/>
+        </p:nvSpPr>
+        <p:spPr>
+          <a:xfrm>
+            <a:off x="4157324" y="2745564"/>
+            <a:ext cx="1080000" cy="1080000"/>
+          </a:xfrm>
+          <a:prstGeom prst="rect">
+            <a:avLst/>
+          </a:prstGeom>
+        </p:spPr>
+        <p:style>
+          <a:lnRef idx="2">
+            <a:schemeClr val="accent1">
+              <a:shade val="50000"/>
+            </a:schemeClr>
+          </a:lnRef>
+          <a:fillRef idx="1">
+            <a:schemeClr val="accent1"/>
+          </a:fillRef>
+          <a:effectRef idx="0">
+            <a:schemeClr val="accent1"/>
+          </a:effectRef>
+          <a:fontRef idx="minor">
+            <a:schemeClr val="lt1"/>
+          </a:fontRef>
+        </p:style>
+        <p:txBody>
+          <a:bodyPr rtlCol="0" anchor="ctr"/>
+          <a:lstStyle/>
+          <a:p>
+            <a:pPr algn="ctr"/>
+            <a:endParaRPr kumimoji="1" lang="ja-JP" altLang="en-US"/>
+          </a:p>
+        </p:txBody>
+      </p:sp>
+      <p:sp>
+        <p:nvSpPr>
+          <p:cNvPr id="13" name="スマイル 12">
+            <a:extLst>
+              <a:ext uri="{FF2B5EF4-FFF2-40B4-BE49-F238E27FC236}">
+                <a16:creationId xmlns:a16="http://schemas.microsoft.com/office/drawing/2014/main" id="{EA10F951-05B9-4805-B573-CA6A33699461}"/>
+              </a:ext>
+            </a:extLst>
+          </p:cNvPr>
+          <p:cNvSpPr/>
+          <p:nvPr/>
+        </p:nvSpPr>
+        <p:spPr>
+          <a:xfrm>
+            <a:off x="3077324" y="2745564"/>
+            <a:ext cx="1080000" cy="1080000"/>
+          </a:xfrm>
+          <a:prstGeom prst="smileyFace">
+            <a:avLst/>
+          </a:prstGeom>
+        </p:spPr>
+        <p:style>
+          <a:lnRef idx="2">
+            <a:schemeClr val="accent4">
+              <a:shade val="50000"/>
+            </a:schemeClr>
+          </a:lnRef>
+          <a:fillRef idx="1">
+            <a:schemeClr val="accent4"/>
+          </a:fillRef>
+          <a:effectRef idx="0">
+            <a:schemeClr val="accent4"/>
+          </a:effectRef>
+          <a:fontRef idx="minor">
+            <a:schemeClr val="lt1"/>
+          </a:fontRef>
+        </p:style>
+        <p:txBody>
+          <a:bodyPr rtlCol="0" anchor="ctr"/>
+          <a:lstStyle/>
+          <a:p>
+            <a:pPr algn="ctr"/>
+            <a:endParaRPr kumimoji="1" lang="ja-JP" altLang="en-US"/>
+          </a:p>
+        </p:txBody>
+      </p:sp>
+      <p:cxnSp>
+        <p:nvCxnSpPr>
+          <p:cNvPr id="14" name="直線矢印コネクタ 13">
+            <a:extLst>
+              <a:ext uri="{FF2B5EF4-FFF2-40B4-BE49-F238E27FC236}">
+                <a16:creationId xmlns:a16="http://schemas.microsoft.com/office/drawing/2014/main" id="{9941DEC1-38A9-47E8-8A84-1570A381927F}"/>
+              </a:ext>
+            </a:extLst>
+          </p:cNvPr>
+          <p:cNvCxnSpPr>
+            <a:cxnSpLocks/>
+          </p:cNvCxnSpPr>
+          <p:nvPr/>
+        </p:nvCxnSpPr>
+        <p:spPr>
+          <a:xfrm flipH="1">
+            <a:off x="4157324" y="3278692"/>
+            <a:ext cx="420616" cy="0"/>
+          </a:xfrm>
+          <a:prstGeom prst="straightConnector1">
+            <a:avLst/>
+          </a:prstGeom>
+          <a:ln w="38100">
+            <a:solidFill>
+              <a:srgbClr val="FF0000"/>
+            </a:solidFill>
+            <a:tailEnd type="triangle"/>
+          </a:ln>
+        </p:spPr>
+        <p:style>
+          <a:lnRef idx="1">
+            <a:schemeClr val="accent1"/>
+          </a:lnRef>
+          <a:fillRef idx="0">
+            <a:schemeClr val="accent1"/>
+          </a:fillRef>
+          <a:effectRef idx="0">
+            <a:schemeClr val="accent1"/>
+          </a:effectRef>
+          <a:fontRef idx="minor">
+            <a:schemeClr val="tx1"/>
+          </a:fontRef>
+        </p:style>
+      </p:cxnSp>
+      <p:sp>
+        <p:nvSpPr>
+          <p:cNvPr id="15" name="正方形/長方形 14">
+            <a:extLst>
+              <a:ext uri="{FF2B5EF4-FFF2-40B4-BE49-F238E27FC236}">
+                <a16:creationId xmlns:a16="http://schemas.microsoft.com/office/drawing/2014/main" id="{C1A405E4-760E-473F-AF12-CDF045B2E3C1}"/>
+              </a:ext>
+            </a:extLst>
+          </p:cNvPr>
+          <p:cNvSpPr/>
+          <p:nvPr/>
+        </p:nvSpPr>
+        <p:spPr>
+          <a:xfrm>
+            <a:off x="712759" y="5286046"/>
+            <a:ext cx="1080000" cy="1080000"/>
+          </a:xfrm>
+          <a:prstGeom prst="rect">
+            <a:avLst/>
+          </a:prstGeom>
+        </p:spPr>
+        <p:style>
+          <a:lnRef idx="2">
+            <a:schemeClr val="accent1">
+              <a:shade val="50000"/>
+            </a:schemeClr>
+          </a:lnRef>
+          <a:fillRef idx="1">
+            <a:schemeClr val="accent1"/>
+          </a:fillRef>
+          <a:effectRef idx="0">
+            <a:schemeClr val="accent1"/>
+          </a:effectRef>
+          <a:fontRef idx="minor">
+            <a:schemeClr val="lt1"/>
+          </a:fontRef>
+        </p:style>
+        <p:txBody>
+          <a:bodyPr rtlCol="0" anchor="ctr"/>
+          <a:lstStyle/>
+          <a:p>
+            <a:pPr algn="ctr"/>
+            <a:endParaRPr kumimoji="1" lang="ja-JP" altLang="en-US"/>
+          </a:p>
+        </p:txBody>
+      </p:sp>
+      <p:sp>
+        <p:nvSpPr>
+          <p:cNvPr id="16" name="スマイル 15">
+            <a:extLst>
+              <a:ext uri="{FF2B5EF4-FFF2-40B4-BE49-F238E27FC236}">
+                <a16:creationId xmlns:a16="http://schemas.microsoft.com/office/drawing/2014/main" id="{5BACB2FC-BAC3-46A0-865D-1EBBC1A17997}"/>
+              </a:ext>
+            </a:extLst>
+          </p:cNvPr>
+          <p:cNvSpPr/>
+          <p:nvPr/>
+        </p:nvSpPr>
+        <p:spPr>
+          <a:xfrm>
+            <a:off x="1409812" y="5279174"/>
+            <a:ext cx="1080000" cy="1080000"/>
+          </a:xfrm>
+          <a:prstGeom prst="smileyFace">
+            <a:avLst/>
+          </a:prstGeom>
+        </p:spPr>
+        <p:style>
+          <a:lnRef idx="2">
+            <a:schemeClr val="accent4">
+              <a:shade val="50000"/>
+            </a:schemeClr>
+          </a:lnRef>
+          <a:fillRef idx="1">
+            <a:schemeClr val="accent4"/>
+          </a:fillRef>
+          <a:effectRef idx="0">
+            <a:schemeClr val="accent4"/>
+          </a:effectRef>
+          <a:fontRef idx="minor">
+            <a:schemeClr val="lt1"/>
+          </a:fontRef>
+        </p:style>
+        <p:txBody>
+          <a:bodyPr rtlCol="0" anchor="ctr"/>
+          <a:lstStyle/>
+          <a:p>
+            <a:pPr algn="ctr"/>
+            <a:endParaRPr kumimoji="1" lang="ja-JP" altLang="en-US"/>
+          </a:p>
+        </p:txBody>
+      </p:sp>
+      <p:cxnSp>
+        <p:nvCxnSpPr>
+          <p:cNvPr id="17" name="直線矢印コネクタ 16">
+            <a:extLst>
+              <a:ext uri="{FF2B5EF4-FFF2-40B4-BE49-F238E27FC236}">
+                <a16:creationId xmlns:a16="http://schemas.microsoft.com/office/drawing/2014/main" id="{B90F5C67-478C-40A0-9B3B-FD6766602A26}"/>
+              </a:ext>
+            </a:extLst>
+          </p:cNvPr>
+          <p:cNvCxnSpPr>
+            <a:cxnSpLocks/>
+          </p:cNvCxnSpPr>
+          <p:nvPr/>
+        </p:nvCxnSpPr>
+        <p:spPr>
+          <a:xfrm flipH="1">
+            <a:off x="1409812" y="5178199"/>
+            <a:ext cx="1080000" cy="0"/>
+          </a:xfrm>
+          <a:prstGeom prst="straightConnector1">
+            <a:avLst/>
+          </a:prstGeom>
+          <a:ln w="38100">
+            <a:solidFill>
+              <a:srgbClr val="FF0000"/>
+            </a:solidFill>
+            <a:tailEnd type="triangle"/>
+          </a:ln>
+        </p:spPr>
+        <p:style>
+          <a:lnRef idx="1">
+            <a:schemeClr val="accent1"/>
+          </a:lnRef>
+          <a:fillRef idx="0">
+            <a:schemeClr val="accent1"/>
+          </a:fillRef>
+          <a:effectRef idx="0">
+            <a:schemeClr val="accent1"/>
+          </a:effectRef>
+          <a:fontRef idx="minor">
+            <a:schemeClr val="tx1"/>
+          </a:fontRef>
+        </p:style>
+      </p:cxnSp>
+      <p:sp>
+        <p:nvSpPr>
+          <p:cNvPr id="18" name="正方形/長方形 17">
+            <a:extLst>
+              <a:ext uri="{FF2B5EF4-FFF2-40B4-BE49-F238E27FC236}">
+                <a16:creationId xmlns:a16="http://schemas.microsoft.com/office/drawing/2014/main" id="{B71DF198-CF83-43A6-AE16-94634D6692AF}"/>
+              </a:ext>
+            </a:extLst>
+          </p:cNvPr>
+          <p:cNvSpPr/>
+          <p:nvPr/>
+        </p:nvSpPr>
+        <p:spPr>
+          <a:xfrm>
+            <a:off x="3617324" y="5286046"/>
+            <a:ext cx="1080000" cy="1080000"/>
+          </a:xfrm>
+          <a:prstGeom prst="rect">
+            <a:avLst/>
+          </a:prstGeom>
+        </p:spPr>
+        <p:style>
+          <a:lnRef idx="2">
+            <a:schemeClr val="accent1">
+              <a:shade val="50000"/>
+            </a:schemeClr>
+          </a:lnRef>
+          <a:fillRef idx="1">
+            <a:schemeClr val="accent1"/>
+          </a:fillRef>
+          <a:effectRef idx="0">
+            <a:schemeClr val="accent1"/>
+          </a:effectRef>
+          <a:fontRef idx="minor">
+            <a:schemeClr val="lt1"/>
+          </a:fontRef>
+        </p:style>
+        <p:txBody>
+          <a:bodyPr rtlCol="0" anchor="ctr"/>
+          <a:lstStyle/>
+          <a:p>
+            <a:pPr algn="ctr"/>
+            <a:endParaRPr kumimoji="1" lang="ja-JP" altLang="en-US"/>
+          </a:p>
+        </p:txBody>
+      </p:sp>
+      <p:sp>
+        <p:nvSpPr>
+          <p:cNvPr id="19" name="スマイル 18">
+            <a:extLst>
+              <a:ext uri="{FF2B5EF4-FFF2-40B4-BE49-F238E27FC236}">
+                <a16:creationId xmlns:a16="http://schemas.microsoft.com/office/drawing/2014/main" id="{121EB491-1C6A-4B07-AA71-0BAEB0E30313}"/>
+              </a:ext>
+            </a:extLst>
+          </p:cNvPr>
+          <p:cNvSpPr/>
+          <p:nvPr/>
+        </p:nvSpPr>
+        <p:spPr>
+          <a:xfrm>
+            <a:off x="4697324" y="5286046"/>
+            <a:ext cx="1080000" cy="1080000"/>
+          </a:xfrm>
+          <a:prstGeom prst="smileyFace">
+            <a:avLst/>
+          </a:prstGeom>
+        </p:spPr>
+        <p:style>
+          <a:lnRef idx="2">
+            <a:schemeClr val="accent4">
+              <a:shade val="50000"/>
+            </a:schemeClr>
+          </a:lnRef>
+          <a:fillRef idx="1">
+            <a:schemeClr val="accent4"/>
+          </a:fillRef>
+          <a:effectRef idx="0">
+            <a:schemeClr val="accent4"/>
+          </a:effectRef>
+          <a:fontRef idx="minor">
+            <a:schemeClr val="lt1"/>
+          </a:fontRef>
+        </p:style>
+        <p:txBody>
+          <a:bodyPr rtlCol="0" anchor="ctr"/>
+          <a:lstStyle/>
+          <a:p>
+            <a:pPr algn="ctr"/>
+            <a:endParaRPr kumimoji="1" lang="ja-JP" altLang="en-US"/>
+          </a:p>
+        </p:txBody>
+      </p:sp>
+      <p:cxnSp>
+        <p:nvCxnSpPr>
+          <p:cNvPr id="20" name="直線矢印コネクタ 19">
+            <a:extLst>
+              <a:ext uri="{FF2B5EF4-FFF2-40B4-BE49-F238E27FC236}">
+                <a16:creationId xmlns:a16="http://schemas.microsoft.com/office/drawing/2014/main" id="{84CF157D-C547-4900-BB4E-8BFEA1B58EE7}"/>
+              </a:ext>
+            </a:extLst>
+          </p:cNvPr>
+          <p:cNvCxnSpPr>
+            <a:cxnSpLocks/>
+            <a:endCxn id="19" idx="2"/>
+          </p:cNvCxnSpPr>
+          <p:nvPr/>
+        </p:nvCxnSpPr>
+        <p:spPr>
+          <a:xfrm>
+            <a:off x="4314377" y="5819174"/>
+            <a:ext cx="382947" cy="6872"/>
+          </a:xfrm>
+          <a:prstGeom prst="straightConnector1">
+            <a:avLst/>
+          </a:prstGeom>
+          <a:ln w="38100">
+            <a:solidFill>
+              <a:srgbClr val="FF0000"/>
+            </a:solidFill>
+            <a:tailEnd type="triangle"/>
+          </a:ln>
+        </p:spPr>
+        <p:style>
+          <a:lnRef idx="1">
+            <a:schemeClr val="accent1"/>
+          </a:lnRef>
+          <a:fillRef idx="0">
+            <a:schemeClr val="accent1"/>
+          </a:fillRef>
+          <a:effectRef idx="0">
+            <a:schemeClr val="accent1"/>
+          </a:effectRef>
+          <a:fontRef idx="minor">
+            <a:schemeClr val="tx1"/>
+          </a:fontRef>
+        </p:style>
+      </p:cxnSp>
+      <p:sp>
+        <p:nvSpPr>
+          <p:cNvPr id="23" name="テキスト ボックス 22">
+            <a:extLst>
+              <a:ext uri="{FF2B5EF4-FFF2-40B4-BE49-F238E27FC236}">
+                <a16:creationId xmlns:a16="http://schemas.microsoft.com/office/drawing/2014/main" id="{7411E7DD-C430-43EE-A4CB-3CE3D4A288EC}"/>
               </a:ext>
             </a:extLst>
           </p:cNvPr>
@@ -6710,8 +6609,8 @@
         </p:nvSpPr>
         <p:spPr>
           <a:xfrm>
-            <a:off x="567542" y="4851457"/>
-            <a:ext cx="5032147" cy="369332"/>
+            <a:off x="567542" y="2112863"/>
+            <a:ext cx="3185487" cy="369332"/>
           </a:xfrm>
           <a:prstGeom prst="rect">
             <a:avLst/>
@@ -6725,12 +6624,44 @@
           <a:lstStyle/>
           <a:p>
             <a:r>
-              <a:rPr kumimoji="1" lang="en-US" altLang="ja-JP" dirty="0"/>
-              <a:t>※</a:t>
-            </a:r>
-            <a:r>
               <a:rPr kumimoji="1" lang="ja-JP" altLang="en-US" dirty="0"/>
-              <a:t>次ページに計算に必要な変数、定数一覧あり</a:t>
+              <a:t>■右に移動中に当たった場合</a:t>
+            </a:r>
+            <a:endParaRPr kumimoji="1" lang="en-US" altLang="ja-JP" dirty="0"/>
+          </a:p>
+        </p:txBody>
+      </p:sp>
+      <p:sp>
+        <p:nvSpPr>
+          <p:cNvPr id="24" name="テキスト ボックス 23">
+            <a:extLst>
+              <a:ext uri="{FF2B5EF4-FFF2-40B4-BE49-F238E27FC236}">
+                <a16:creationId xmlns:a16="http://schemas.microsoft.com/office/drawing/2014/main" id="{C465B35D-931A-4DE7-865F-491D4D87E1D5}"/>
+              </a:ext>
+            </a:extLst>
+          </p:cNvPr>
+          <p:cNvSpPr txBox="1"/>
+          <p:nvPr/>
+        </p:nvSpPr>
+        <p:spPr>
+          <a:xfrm>
+            <a:off x="567541" y="4678125"/>
+            <a:ext cx="3185487" cy="369332"/>
+          </a:xfrm>
+          <a:prstGeom prst="rect">
+            <a:avLst/>
+          </a:prstGeom>
+          <a:noFill/>
+        </p:spPr>
+        <p:txBody>
+          <a:bodyPr wrap="none" rtlCol="0">
+            <a:spAutoFit/>
+          </a:bodyPr>
+          <a:lstStyle/>
+          <a:p>
+            <a:r>
+              <a:rPr kumimoji="1" lang="ja-JP" altLang="en-US" dirty="0"/>
+              <a:t>■左に移動中に当たった場合</a:t>
             </a:r>
             <a:endParaRPr kumimoji="1" lang="en-US" altLang="ja-JP" dirty="0"/>
           </a:p>
@@ -6739,7 +6670,7 @@
     </p:spTree>
     <p:extLst>
       <p:ext uri="{BB962C8B-B14F-4D97-AF65-F5344CB8AC3E}">
-        <p14:creationId xmlns:p14="http://schemas.microsoft.com/office/powerpoint/2010/main" val="164039833"/>
+        <p14:creationId xmlns:p14="http://schemas.microsoft.com/office/powerpoint/2010/main" val="4079340338"/>
       </p:ext>
     </p:extLst>
   </p:cSld>
@@ -6816,7 +6747,7 @@
         <p:spPr>
           <a:xfrm>
             <a:off x="567542" y="1216429"/>
-            <a:ext cx="6647974" cy="4431983"/>
+            <a:ext cx="5416868" cy="461665"/>
           </a:xfrm>
           <a:prstGeom prst="rect">
             <a:avLst/>
@@ -6831,166 +6762,86 @@
           <a:p>
             <a:r>
               <a:rPr kumimoji="1" lang="ja-JP" altLang="en-US" sz="2400" dirty="0"/>
-              <a:t>計算に必要な変数、定数です</a:t>
+              <a:t>よく考えて空白を埋めてみましょう。</a:t>
             </a:r>
             <a:endParaRPr kumimoji="1" lang="en-US" altLang="ja-JP" sz="2400" dirty="0"/>
           </a:p>
-          <a:p>
-            <a:endParaRPr lang="en-US" altLang="ja-JP" sz="2400" dirty="0"/>
-          </a:p>
-          <a:p>
-            <a:r>
-              <a:rPr kumimoji="1" lang="ja-JP" altLang="en-US" b="1" dirty="0">
-                <a:solidFill>
-                  <a:srgbClr val="FF0000"/>
-                </a:solidFill>
-              </a:rPr>
-              <a:t>■プレイヤー関連</a:t>
-            </a:r>
-            <a:endParaRPr kumimoji="1" lang="en-US" altLang="ja-JP" b="1" dirty="0">
-              <a:solidFill>
-                <a:srgbClr val="FF0000"/>
-              </a:solidFill>
-            </a:endParaRPr>
-          </a:p>
+        </p:txBody>
+      </p:sp>
+      <p:sp>
+        <p:nvSpPr>
+          <p:cNvPr id="21" name="テキスト ボックス 20">
+            <a:extLst>
+              <a:ext uri="{FF2B5EF4-FFF2-40B4-BE49-F238E27FC236}">
+                <a16:creationId xmlns:a16="http://schemas.microsoft.com/office/drawing/2014/main" id="{F1087DC1-65C6-4EDF-A449-28A7B6474015}"/>
+              </a:ext>
+            </a:extLst>
+          </p:cNvPr>
+          <p:cNvSpPr txBox="1"/>
+          <p:nvPr/>
+        </p:nvSpPr>
+        <p:spPr>
+          <a:xfrm>
+            <a:off x="567542" y="6057900"/>
+            <a:ext cx="4339650" cy="369332"/>
+          </a:xfrm>
+          <a:prstGeom prst="rect">
+            <a:avLst/>
+          </a:prstGeom>
+          <a:noFill/>
+        </p:spPr>
+        <p:txBody>
+          <a:bodyPr wrap="none" rtlCol="0">
+            <a:spAutoFit/>
+          </a:bodyPr>
+          <a:lstStyle/>
           <a:p>
             <a:r>
               <a:rPr kumimoji="1" lang="en-US" altLang="ja-JP" dirty="0"/>
-              <a:t>X</a:t>
+              <a:t>※</a:t>
             </a:r>
             <a:r>
               <a:rPr kumimoji="1" lang="ja-JP" altLang="en-US" dirty="0"/>
-              <a:t>座標：</a:t>
-            </a:r>
-            <a:r>
-              <a:rPr kumimoji="1" lang="en-US" altLang="ja-JP" dirty="0" err="1"/>
-              <a:t>g_PlayerData.PosX</a:t>
+              <a:t>次ページに計算に必要な変数一覧あり</a:t>
             </a:r>
             <a:endParaRPr kumimoji="1" lang="en-US" altLang="ja-JP" dirty="0"/>
           </a:p>
-          <a:p>
-            <a:r>
-              <a:rPr lang="en-US" altLang="ja-JP" dirty="0"/>
-              <a:t>Y</a:t>
-            </a:r>
-            <a:r>
-              <a:rPr lang="ja-JP" altLang="en-US" dirty="0"/>
-              <a:t>座標：</a:t>
-            </a:r>
-            <a:r>
-              <a:rPr lang="en-US" altLang="ja-JP" dirty="0" err="1"/>
-              <a:t>g_PlayerData.PosY</a:t>
-            </a:r>
-            <a:endParaRPr lang="en-US" altLang="ja-JP" dirty="0"/>
-          </a:p>
-          <a:p>
-            <a:r>
-              <a:rPr kumimoji="1" lang="ja-JP" altLang="en-US" dirty="0"/>
-              <a:t>横幅：</a:t>
-            </a:r>
-            <a:r>
-              <a:rPr kumimoji="1" lang="en-US" altLang="ja-JP" dirty="0"/>
-              <a:t>PLAYER_WIDTH</a:t>
-            </a:r>
-          </a:p>
-          <a:p>
-            <a:r>
-              <a:rPr lang="ja-JP" altLang="en-US" dirty="0"/>
-              <a:t>縦幅：</a:t>
-            </a:r>
-            <a:r>
-              <a:rPr lang="en-US" altLang="ja-JP" dirty="0"/>
-              <a:t>PLAYER_HEIGHT</a:t>
-            </a:r>
-          </a:p>
-          <a:p>
-            <a:endParaRPr kumimoji="1" lang="en-US" altLang="ja-JP" dirty="0"/>
-          </a:p>
-          <a:p>
-            <a:r>
-              <a:rPr lang="ja-JP" altLang="en-US" b="1" dirty="0">
-                <a:solidFill>
-                  <a:srgbClr val="FF0000"/>
-                </a:solidFill>
-              </a:rPr>
-              <a:t>■マップチップ関連</a:t>
-            </a:r>
-            <a:endParaRPr lang="en-US" altLang="ja-JP" b="1" dirty="0">
-              <a:solidFill>
-                <a:srgbClr val="FF0000"/>
-              </a:solidFill>
-            </a:endParaRPr>
-          </a:p>
-          <a:p>
-            <a:r>
-              <a:rPr kumimoji="1" lang="en-US" altLang="ja-JP" dirty="0"/>
-              <a:t>X</a:t>
-            </a:r>
-            <a:r>
-              <a:rPr kumimoji="1" lang="ja-JP" altLang="en-US" dirty="0"/>
-              <a:t>座標：</a:t>
-            </a:r>
-            <a:r>
-              <a:rPr kumimoji="1" lang="en-US" altLang="ja-JP" dirty="0" err="1"/>
-              <a:t>hitX</a:t>
-            </a:r>
-            <a:endParaRPr kumimoji="1" lang="en-US" altLang="ja-JP" dirty="0"/>
-          </a:p>
-          <a:p>
-            <a:r>
-              <a:rPr lang="en-US" altLang="ja-JP" dirty="0"/>
-              <a:t>Y</a:t>
-            </a:r>
-            <a:r>
-              <a:rPr lang="ja-JP" altLang="en-US" dirty="0"/>
-              <a:t>座標：</a:t>
-            </a:r>
-            <a:r>
-              <a:rPr lang="en-US" altLang="ja-JP" dirty="0" err="1"/>
-              <a:t>hitY</a:t>
-            </a:r>
-            <a:endParaRPr lang="en-US" altLang="ja-JP" dirty="0"/>
-          </a:p>
-          <a:p>
-            <a:r>
-              <a:rPr kumimoji="1" lang="ja-JP" altLang="en-US" dirty="0"/>
-              <a:t>横幅：</a:t>
-            </a:r>
-            <a:r>
-              <a:rPr kumimoji="1" lang="en-US" altLang="ja-JP" dirty="0"/>
-              <a:t>MAP_CHIP_WIDTH</a:t>
-            </a:r>
-          </a:p>
-          <a:p>
-            <a:r>
-              <a:rPr lang="ja-JP" altLang="en-US" dirty="0"/>
-              <a:t>縦幅：</a:t>
-            </a:r>
-            <a:r>
-              <a:rPr lang="en-US" altLang="ja-JP" dirty="0"/>
-              <a:t>MAP_CHIP_HEIGHT</a:t>
-            </a:r>
-          </a:p>
-          <a:p>
-            <a:endParaRPr kumimoji="1" lang="en-US" altLang="ja-JP" dirty="0"/>
-          </a:p>
-          <a:p>
-            <a:r>
-              <a:rPr lang="en-US" altLang="ja-JP" dirty="0"/>
-              <a:t>※</a:t>
-            </a:r>
-            <a:r>
-              <a:rPr lang="ja-JP" altLang="en-US" dirty="0"/>
-              <a:t>次ページからヒント（なるべく見ないで頑張りましょう）</a:t>
-            </a:r>
-            <a:endParaRPr kumimoji="1" lang="en-US" altLang="ja-JP" dirty="0"/>
-          </a:p>
-        </p:txBody>
-      </p:sp>
+        </p:txBody>
+      </p:sp>
+      <p:pic>
+        <p:nvPicPr>
+          <p:cNvPr id="5" name="図 4">
+            <a:extLst>
+              <a:ext uri="{FF2B5EF4-FFF2-40B4-BE49-F238E27FC236}">
+                <a16:creationId xmlns:a16="http://schemas.microsoft.com/office/drawing/2014/main" id="{8A2AF8B2-F063-427B-8748-55ECA560E463}"/>
+              </a:ext>
+            </a:extLst>
+          </p:cNvPr>
+          <p:cNvPicPr>
+            <a:picLocks noChangeAspect="1"/>
+          </p:cNvPicPr>
+          <p:nvPr/>
+        </p:nvPicPr>
+        <p:blipFill>
+          <a:blip r:embed="rId2"/>
+          <a:stretch>
+            <a:fillRect/>
+          </a:stretch>
+        </p:blipFill>
+        <p:spPr>
+          <a:xfrm>
+            <a:off x="567542" y="1817794"/>
+            <a:ext cx="8521974" cy="4100406"/>
+          </a:xfrm>
+          <a:prstGeom prst="rect">
+            <a:avLst/>
+          </a:prstGeom>
+        </p:spPr>
+      </p:pic>
     </p:spTree>
     <p:extLst>
       <p:ext uri="{BB962C8B-B14F-4D97-AF65-F5344CB8AC3E}">
-        <p14:creationId xmlns:p14="http://schemas.microsoft.com/office/powerpoint/2010/main" val="285467326"/>
+        <p14:creationId xmlns:p14="http://schemas.microsoft.com/office/powerpoint/2010/main" val="164039833"/>
       </p:ext>
     </p:extLst>
   </p:cSld>
@@ -7032,6 +6883,179 @@
         <p:spPr>
           <a:xfrm>
             <a:off x="567542" y="491954"/>
+            <a:ext cx="2646878" cy="584775"/>
+          </a:xfrm>
+          <a:prstGeom prst="rect">
+            <a:avLst/>
+          </a:prstGeom>
+          <a:noFill/>
+        </p:spPr>
+        <p:txBody>
+          <a:bodyPr wrap="none" rtlCol="0">
+            <a:spAutoFit/>
+          </a:bodyPr>
+          <a:lstStyle/>
+          <a:p>
+            <a:r>
+              <a:rPr kumimoji="1" lang="ja-JP" altLang="en-US" sz="3200" b="1" u="sng" dirty="0"/>
+              <a:t>押し出し処理</a:t>
+            </a:r>
+          </a:p>
+        </p:txBody>
+      </p:sp>
+      <p:sp>
+        <p:nvSpPr>
+          <p:cNvPr id="6" name="テキスト ボックス 5">
+            <a:extLst>
+              <a:ext uri="{FF2B5EF4-FFF2-40B4-BE49-F238E27FC236}">
+                <a16:creationId xmlns:a16="http://schemas.microsoft.com/office/drawing/2014/main" id="{55830AD6-028B-4C4E-80BF-B70DFC1C3A46}"/>
+              </a:ext>
+            </a:extLst>
+          </p:cNvPr>
+          <p:cNvSpPr txBox="1"/>
+          <p:nvPr/>
+        </p:nvSpPr>
+        <p:spPr>
+          <a:xfrm>
+            <a:off x="567542" y="1216429"/>
+            <a:ext cx="6417141" cy="2769989"/>
+          </a:xfrm>
+          <a:prstGeom prst="rect">
+            <a:avLst/>
+          </a:prstGeom>
+          <a:noFill/>
+        </p:spPr>
+        <p:txBody>
+          <a:bodyPr wrap="none" rtlCol="0">
+            <a:spAutoFit/>
+          </a:bodyPr>
+          <a:lstStyle/>
+          <a:p>
+            <a:r>
+              <a:rPr kumimoji="1" lang="ja-JP" altLang="en-US" sz="2400" dirty="0"/>
+              <a:t>計算に必要な変数です</a:t>
+            </a:r>
+            <a:endParaRPr kumimoji="1" lang="en-US" altLang="ja-JP" sz="2400" dirty="0"/>
+          </a:p>
+          <a:p>
+            <a:endParaRPr lang="en-US" altLang="ja-JP" sz="2400" dirty="0"/>
+          </a:p>
+          <a:p>
+            <a:r>
+              <a:rPr kumimoji="1" lang="ja-JP" altLang="en-US" b="1" dirty="0">
+                <a:solidFill>
+                  <a:srgbClr val="FF0000"/>
+                </a:solidFill>
+              </a:rPr>
+              <a:t>■プレイヤー関連</a:t>
+            </a:r>
+            <a:endParaRPr kumimoji="1" lang="en-US" altLang="ja-JP" b="1" dirty="0">
+              <a:solidFill>
+                <a:srgbClr val="FF0000"/>
+              </a:solidFill>
+            </a:endParaRPr>
+          </a:p>
+          <a:p>
+            <a:r>
+              <a:rPr lang="en-US" altLang="ja-JP" dirty="0"/>
+              <a:t>body</a:t>
+            </a:r>
+            <a:r>
+              <a:rPr lang="ja-JP" altLang="en-US" dirty="0"/>
+              <a:t>・・・プレイヤーの当たり判定情報を示したポインタ</a:t>
+            </a:r>
+            <a:endParaRPr lang="en-US" altLang="ja-JP" dirty="0"/>
+          </a:p>
+          <a:p>
+            <a:endParaRPr kumimoji="1" lang="en-US" altLang="ja-JP" dirty="0"/>
+          </a:p>
+          <a:p>
+            <a:r>
+              <a:rPr lang="ja-JP" altLang="en-US" b="1" dirty="0">
+                <a:solidFill>
+                  <a:srgbClr val="FF0000"/>
+                </a:solidFill>
+              </a:rPr>
+              <a:t>■マップチップ関連</a:t>
+            </a:r>
+            <a:endParaRPr lang="en-US" altLang="ja-JP" b="1" dirty="0">
+              <a:solidFill>
+                <a:srgbClr val="FF0000"/>
+              </a:solidFill>
+            </a:endParaRPr>
+          </a:p>
+          <a:p>
+            <a:r>
+              <a:rPr kumimoji="1" lang="en-US" altLang="ja-JP" dirty="0"/>
+              <a:t>Block</a:t>
+            </a:r>
+            <a:r>
+              <a:rPr kumimoji="1" lang="ja-JP" altLang="en-US" dirty="0"/>
+              <a:t>・・・ブロックの情報を示したポインタ</a:t>
+            </a:r>
+            <a:endParaRPr lang="en-US" altLang="ja-JP" dirty="0"/>
+          </a:p>
+          <a:p>
+            <a:endParaRPr kumimoji="1" lang="en-US" altLang="ja-JP" dirty="0"/>
+          </a:p>
+          <a:p>
+            <a:r>
+              <a:rPr lang="en-US" altLang="ja-JP" dirty="0"/>
+              <a:t>※</a:t>
+            </a:r>
+            <a:r>
+              <a:rPr lang="ja-JP" altLang="en-US" dirty="0"/>
+              <a:t>次ページからヒント（なるべく見ないで頑張りましょう）</a:t>
+            </a:r>
+            <a:endParaRPr kumimoji="1" lang="en-US" altLang="ja-JP" dirty="0"/>
+          </a:p>
+        </p:txBody>
+      </p:sp>
+    </p:spTree>
+    <p:extLst>
+      <p:ext uri="{BB962C8B-B14F-4D97-AF65-F5344CB8AC3E}">
+        <p14:creationId xmlns:p14="http://schemas.microsoft.com/office/powerpoint/2010/main" val="285467326"/>
+      </p:ext>
+    </p:extLst>
+  </p:cSld>
+  <p:clrMapOvr>
+    <a:masterClrMapping/>
+  </p:clrMapOvr>
+</p:sld>
+</file>
+
+<file path=ppt/slides/slide9.xml><?xml version="1.0" encoding="utf-8"?>
+<p:sld xmlns:a="http://schemas.openxmlformats.org/drawingml/2006/main" xmlns:r="http://schemas.openxmlformats.org/officeDocument/2006/relationships" xmlns:p="http://schemas.openxmlformats.org/presentationml/2006/main">
+  <p:cSld>
+    <p:spTree>
+      <p:nvGrpSpPr>
+        <p:cNvPr id="1" name=""/>
+        <p:cNvGrpSpPr/>
+        <p:nvPr/>
+      </p:nvGrpSpPr>
+      <p:grpSpPr>
+        <a:xfrm>
+          <a:off x="0" y="0"/>
+          <a:ext cx="0" cy="0"/>
+          <a:chOff x="0" y="0"/>
+          <a:chExt cx="0" cy="0"/>
+        </a:xfrm>
+      </p:grpSpPr>
+      <p:sp>
+        <p:nvSpPr>
+          <p:cNvPr id="4" name="テキスト ボックス 3">
+            <a:extLst>
+              <a:ext uri="{FF2B5EF4-FFF2-40B4-BE49-F238E27FC236}">
+                <a16:creationId xmlns:a16="http://schemas.microsoft.com/office/drawing/2014/main" id="{5A13BF46-B8C5-48AA-8308-C9ECFF431A18}"/>
+              </a:ext>
+            </a:extLst>
+          </p:cNvPr>
+          <p:cNvSpPr txBox="1"/>
+          <p:nvPr/>
+        </p:nvSpPr>
+        <p:spPr>
+          <a:xfrm>
+            <a:off x="567542" y="491954"/>
             <a:ext cx="3995004" cy="584775"/>
           </a:xfrm>
           <a:prstGeom prst="rect">
@@ -7110,8 +7134,12 @@
               <a:t>左端：</a:t>
             </a:r>
             <a:r>
+              <a:rPr lang="en-US" altLang="ja-JP" dirty="0"/>
+              <a:t>body-&gt;</a:t>
+            </a:r>
+            <a:r>
               <a:rPr lang="en-US" altLang="ja-JP" dirty="0" err="1"/>
-              <a:t>g_PlayerData.PosX</a:t>
+              <a:t>pos.x</a:t>
             </a:r>
             <a:endParaRPr lang="en-US" altLang="ja-JP" dirty="0"/>
           </a:p>
@@ -7133,12 +7161,16 @@
               <a:t>(</a:t>
             </a:r>
             <a:r>
+              <a:rPr lang="en-US" altLang="ja-JP" dirty="0"/>
+              <a:t>body-&gt;</a:t>
+            </a:r>
+            <a:r>
               <a:rPr lang="en-US" altLang="ja-JP" dirty="0" err="1"/>
-              <a:t>g_PlayerData.PosX</a:t>
+              <a:t>pos.x</a:t>
             </a:r>
             <a:r>
               <a:rPr lang="en-US" altLang="ja-JP" dirty="0"/>
-              <a:t> + PLAYER_WIDTH)</a:t>
+              <a:t> + body-&gt;width)</a:t>
             </a:r>
           </a:p>
           <a:p>
@@ -7165,10 +7197,9 @@
               <a:t>左端：</a:t>
             </a:r>
             <a:r>
-              <a:rPr lang="en-US" altLang="ja-JP" dirty="0" err="1"/>
-              <a:t>hitX</a:t>
-            </a:r>
-            <a:endParaRPr lang="en-US" altLang="ja-JP" dirty="0"/>
+              <a:rPr lang="en-US" altLang="ja-JP" dirty="0"/>
+              <a:t>block-&gt;x</a:t>
+            </a:r>
           </a:p>
           <a:p>
             <a:r>
@@ -7188,12 +7219,8 @@
               <a:t>(</a:t>
             </a:r>
             <a:r>
-              <a:rPr lang="en-US" altLang="ja-JP" dirty="0" err="1"/>
-              <a:t>hitX</a:t>
-            </a:r>
-            <a:r>
               <a:rPr lang="en-US" altLang="ja-JP" dirty="0"/>
-              <a:t> + MAP_CHIP_WIDTH)</a:t>
+              <a:t>block-&gt;x + block-&gt;width)</a:t>
             </a:r>
           </a:p>
         </p:txBody>
@@ -7439,137 +7466,6 @@
     <p:extLst>
       <p:ext uri="{BB962C8B-B14F-4D97-AF65-F5344CB8AC3E}">
         <p14:creationId xmlns:p14="http://schemas.microsoft.com/office/powerpoint/2010/main" val="1045853499"/>
-      </p:ext>
-    </p:extLst>
-  </p:cSld>
-  <p:clrMapOvr>
-    <a:masterClrMapping/>
-  </p:clrMapOvr>
-</p:sld>
-</file>
-
-<file path=ppt/slides/slide9.xml><?xml version="1.0" encoding="utf-8"?>
-<p:sld xmlns:a="http://schemas.openxmlformats.org/drawingml/2006/main" xmlns:r="http://schemas.openxmlformats.org/officeDocument/2006/relationships" xmlns:p="http://schemas.openxmlformats.org/presentationml/2006/main">
-  <p:cSld>
-    <p:spTree>
-      <p:nvGrpSpPr>
-        <p:cNvPr id="1" name=""/>
-        <p:cNvGrpSpPr/>
-        <p:nvPr/>
-      </p:nvGrpSpPr>
-      <p:grpSpPr>
-        <a:xfrm>
-          <a:off x="0" y="0"/>
-          <a:ext cx="0" cy="0"/>
-          <a:chOff x="0" y="0"/>
-          <a:chExt cx="0" cy="0"/>
-        </a:xfrm>
-      </p:grpSpPr>
-      <p:sp>
-        <p:nvSpPr>
-          <p:cNvPr id="4" name="テキスト ボックス 3">
-            <a:extLst>
-              <a:ext uri="{FF2B5EF4-FFF2-40B4-BE49-F238E27FC236}">
-                <a16:creationId xmlns:a16="http://schemas.microsoft.com/office/drawing/2014/main" id="{5A13BF46-B8C5-48AA-8308-C9ECFF431A18}"/>
-              </a:ext>
-            </a:extLst>
-          </p:cNvPr>
-          <p:cNvSpPr txBox="1"/>
-          <p:nvPr/>
-        </p:nvSpPr>
-        <p:spPr>
-          <a:xfrm>
-            <a:off x="567542" y="491954"/>
-            <a:ext cx="3995004" cy="584775"/>
-          </a:xfrm>
-          <a:prstGeom prst="rect">
-            <a:avLst/>
-          </a:prstGeom>
-          <a:noFill/>
-        </p:spPr>
-        <p:txBody>
-          <a:bodyPr wrap="none" rtlCol="0">
-            <a:spAutoFit/>
-          </a:bodyPr>
-          <a:lstStyle/>
-          <a:p>
-            <a:r>
-              <a:rPr kumimoji="1" lang="ja-JP" altLang="en-US" sz="3200" b="1" u="sng" dirty="0"/>
-              <a:t>押し出し処理 ヒント</a:t>
-            </a:r>
-          </a:p>
-        </p:txBody>
-      </p:sp>
-      <p:sp>
-        <p:nvSpPr>
-          <p:cNvPr id="6" name="テキスト ボックス 5">
-            <a:extLst>
-              <a:ext uri="{FF2B5EF4-FFF2-40B4-BE49-F238E27FC236}">
-                <a16:creationId xmlns:a16="http://schemas.microsoft.com/office/drawing/2014/main" id="{55830AD6-028B-4C4E-80BF-B70DFC1C3A46}"/>
-              </a:ext>
-            </a:extLst>
-          </p:cNvPr>
-          <p:cNvSpPr txBox="1"/>
-          <p:nvPr/>
-        </p:nvSpPr>
-        <p:spPr>
-          <a:xfrm>
-            <a:off x="567542" y="1216429"/>
-            <a:ext cx="7263527" cy="461665"/>
-          </a:xfrm>
-          <a:prstGeom prst="rect">
-            <a:avLst/>
-          </a:prstGeom>
-          <a:noFill/>
-        </p:spPr>
-        <p:txBody>
-          <a:bodyPr wrap="none" rtlCol="0">
-            <a:spAutoFit/>
-          </a:bodyPr>
-          <a:lstStyle/>
-          <a:p>
-            <a:r>
-              <a:rPr kumimoji="1" lang="ja-JP" altLang="en-US" sz="2400" dirty="0"/>
-              <a:t>押し出した後は、これ以上動かないようにします。</a:t>
-            </a:r>
-            <a:endParaRPr kumimoji="1" lang="en-US" altLang="ja-JP" sz="2400" dirty="0"/>
-          </a:p>
-        </p:txBody>
-      </p:sp>
-      <p:pic>
-        <p:nvPicPr>
-          <p:cNvPr id="3" name="図 2">
-            <a:extLst>
-              <a:ext uri="{FF2B5EF4-FFF2-40B4-BE49-F238E27FC236}">
-                <a16:creationId xmlns:a16="http://schemas.microsoft.com/office/drawing/2014/main" id="{F5DE9B4C-4FBB-4568-8D16-B7BA6B944AAD}"/>
-              </a:ext>
-            </a:extLst>
-          </p:cNvPr>
-          <p:cNvPicPr>
-            <a:picLocks noChangeAspect="1"/>
-          </p:cNvPicPr>
-          <p:nvPr/>
-        </p:nvPicPr>
-        <p:blipFill>
-          <a:blip r:embed="rId2"/>
-          <a:stretch>
-            <a:fillRect/>
-          </a:stretch>
-        </p:blipFill>
-        <p:spPr>
-          <a:xfrm>
-            <a:off x="567542" y="1817794"/>
-            <a:ext cx="5256104" cy="1095735"/>
-          </a:xfrm>
-          <a:prstGeom prst="rect">
-            <a:avLst/>
-          </a:prstGeom>
-        </p:spPr>
-      </p:pic>
-    </p:spTree>
-    <p:extLst>
-      <p:ext uri="{BB962C8B-B14F-4D97-AF65-F5344CB8AC3E}">
-        <p14:creationId xmlns:p14="http://schemas.microsoft.com/office/powerpoint/2010/main" val="2731333665"/>
       </p:ext>
     </p:extLst>
   </p:cSld>
